--- a/assets/download/오가렌_세일즈가이드_세션2.pptx
+++ b/assets/download/오가렌_세일즈가이드_세션2.pptx
@@ -4360,7 +4360,7 @@
                 <a:ea typeface="Malgun Gothic" pitchFamily="34" charset="-122"/>
                 <a:cs typeface="Malgun Gothic" pitchFamily="34" charset="-120"/>
               </a:rPr>
-              <a:t>SLEEPER  ·  NOOER  ·  TODDLZ</a:t>
+              <a:t>SLEEPER  ·  nooer  ·  Toddles</a:t>
             </a:r>
             <a:endParaRPr lang="en-US" sz="1300" dirty="0"/>
           </a:p>
@@ -5365,7 +5365,7 @@
                 <a:ea typeface="Malgun Gothic" pitchFamily="34" charset="-122"/>
                 <a:cs typeface="Malgun Gothic" pitchFamily="34" charset="-120"/>
               </a:rPr>
-              <a:t>OGAREN  ·  SLEEPER  ·  NOOER  ·  TODDLZ</a:t>
+              <a:t>OGAREN  ·  SLEEPER  ·  nooer  ·  Toddles</a:t>
             </a:r>
             <a:endParaRPr lang="en-US" sz="800" dirty="0"/>
           </a:p>
@@ -6760,7 +6760,7 @@
                 <a:ea typeface="Malgun Gothic" pitchFamily="34" charset="-122"/>
                 <a:cs typeface="Malgun Gothic" pitchFamily="34" charset="-120"/>
               </a:rPr>
-              <a:t>OGAREN  ·  SLEEPER  ·  NOOER  ·  TODDLZ</a:t>
+              <a:t>OGAREN  ·  SLEEPER  ·  nooer  ·  Toddles</a:t>
             </a:r>
             <a:endParaRPr lang="en-US" sz="800" dirty="0"/>
           </a:p>
@@ -7437,7 +7437,7 @@
                 <a:ea typeface="Malgun Gothic" pitchFamily="34" charset="-122"/>
                 <a:cs typeface="Malgun Gothic" pitchFamily="34" charset="-120"/>
               </a:rPr>
-              <a:t>OGAREN  ·  SLEEPER  ·  NOOER  ·  TODDLZ</a:t>
+              <a:t>OGAREN  ·  SLEEPER  ·  nooer  ·  Toddles</a:t>
             </a:r>
             <a:endParaRPr lang="en-US" sz="800" dirty="0"/>
           </a:p>
@@ -8097,7 +8097,7 @@
                 <a:ea typeface="Malgun Gothic" pitchFamily="34" charset="-122"/>
                 <a:cs typeface="Malgun Gothic" pitchFamily="34" charset="-120"/>
               </a:rPr>
-              <a:t>OGAREN  ·  SLEEPER  ·  NOOER  ·  TODDLZ</a:t>
+              <a:t>OGAREN  ·  SLEEPER  ·  nooer  ·  Toddles</a:t>
             </a:r>
             <a:endParaRPr lang="en-US" sz="800" dirty="0"/>
           </a:p>
@@ -8740,7 +8740,7 @@
                 <a:ea typeface="Malgun Gothic" pitchFamily="34" charset="-122"/>
                 <a:cs typeface="Malgun Gothic" pitchFamily="34" charset="-120"/>
               </a:rPr>
-              <a:t>OGAREN  ·  SLEEPER  ·  NOOER  ·  TODDLZ</a:t>
+              <a:t>OGAREN  ·  SLEEPER  ·  nooer  ·  Toddles</a:t>
             </a:r>
             <a:endParaRPr lang="en-US" sz="800" dirty="0"/>
           </a:p>
@@ -9400,7 +9400,7 @@
                 <a:ea typeface="Malgun Gothic" pitchFamily="34" charset="-122"/>
                 <a:cs typeface="Malgun Gothic" pitchFamily="34" charset="-120"/>
               </a:rPr>
-              <a:t>OGAREN  ·  SLEEPER  ·  NOOER  ·  TODDLZ</a:t>
+              <a:t>OGAREN  ·  SLEEPER  ·  nooer  ·  Toddles</a:t>
             </a:r>
             <a:endParaRPr lang="en-US" sz="800" dirty="0"/>
           </a:p>
@@ -10043,7 +10043,7 @@
                 <a:ea typeface="Malgun Gothic" pitchFamily="34" charset="-122"/>
                 <a:cs typeface="Malgun Gothic" pitchFamily="34" charset="-120"/>
               </a:rPr>
-              <a:t>OGAREN  ·  SLEEPER  ·  NOOER  ·  TODDLZ</a:t>
+              <a:t>OGAREN  ·  SLEEPER  ·  nooer  ·  Toddles</a:t>
             </a:r>
             <a:endParaRPr lang="en-US" sz="800" dirty="0"/>
           </a:p>
@@ -10588,7 +10588,7 @@
                 <a:ea typeface="Malgun Gothic" pitchFamily="34" charset="-122"/>
                 <a:cs typeface="Malgun Gothic" pitchFamily="34" charset="-120"/>
               </a:rPr>
-              <a:t>OGAREN  ·  SLEEPER  ·  NOOER  ·  TODDLZ</a:t>
+              <a:t>OGAREN  ·  SLEEPER  ·  nooer  ·  Toddles</a:t>
             </a:r>
             <a:endParaRPr lang="en-US" sz="800" dirty="0"/>
           </a:p>
@@ -11472,7 +11472,7 @@
                 <a:ea typeface="Malgun Gothic" pitchFamily="34" charset="-122"/>
                 <a:cs typeface="Malgun Gothic" pitchFamily="34" charset="-120"/>
               </a:rPr>
-              <a:t>OGAREN  ·  SLEEPER  ·  NOOER  ·  TODDLZ</a:t>
+              <a:t>OGAREN  ·  SLEEPER  ·  nooer  ·  Toddles</a:t>
             </a:r>
             <a:endParaRPr lang="en-US" sz="800" dirty="0"/>
           </a:p>
@@ -12374,7 +12374,7 @@
                 <a:ea typeface="Malgun Gothic" pitchFamily="34" charset="-122"/>
                 <a:cs typeface="Malgun Gothic" pitchFamily="34" charset="-120"/>
               </a:rPr>
-              <a:t>OGAREN  ·  SLEEPER  ·  NOOER  ·  TODDLZ</a:t>
+              <a:t>OGAREN  ·  SLEEPER  ·  nooer  ·  Toddles</a:t>
             </a:r>
             <a:endParaRPr lang="en-US" sz="800" dirty="0"/>
           </a:p>
@@ -13983,7 +13983,7 @@
                 <a:ea typeface="Malgun Gothic" pitchFamily="34" charset="-122"/>
                 <a:cs typeface="Malgun Gothic" pitchFamily="34" charset="-120"/>
               </a:rPr>
-              <a:t>OGAREN  ·  SLEEPER  ·  NOOER  ·  TODDLZ</a:t>
+              <a:t>OGAREN  ·  SLEEPER  ·  nooer  ·  Toddles</a:t>
             </a:r>
             <a:endParaRPr lang="en-US" sz="800" dirty="0"/>
           </a:p>
@@ -14973,7 +14973,7 @@
                 <a:ea typeface="Malgun Gothic" pitchFamily="34" charset="-122"/>
                 <a:cs typeface="Malgun Gothic" pitchFamily="34" charset="-120"/>
               </a:rPr>
-              <a:t>OGAREN  ·  SLEEPER  ·  NOOER  ·  TODDLZ</a:t>
+              <a:t>OGAREN  ·  SLEEPER  ·  nooer  ·  Toddles</a:t>
             </a:r>
             <a:endParaRPr lang="en-US" sz="800" dirty="0"/>
           </a:p>
@@ -15963,7 +15963,7 @@
                 <a:ea typeface="Malgun Gothic" pitchFamily="34" charset="-122"/>
                 <a:cs typeface="Malgun Gothic" pitchFamily="34" charset="-120"/>
               </a:rPr>
-              <a:t>OGAREN  ·  SLEEPER  ·  NOOER  ·  TODDLZ</a:t>
+              <a:t>OGAREN  ·  SLEEPER  ·  nooer  ·  Toddles</a:t>
             </a:r>
             <a:endParaRPr lang="en-US" sz="800" dirty="0"/>
           </a:p>
@@ -17103,7 +17103,7 @@
                 <a:ea typeface="Malgun Gothic" pitchFamily="34" charset="-122"/>
                 <a:cs typeface="Malgun Gothic" pitchFamily="34" charset="-120"/>
               </a:rPr>
-              <a:t>OGAREN  ·  SLEEPER  ·  NOOER  ·  TODDLZ</a:t>
+              <a:t>OGAREN  ·  SLEEPER  ·  nooer  ·  Toddles</a:t>
             </a:r>
             <a:endParaRPr lang="en-US" sz="800" dirty="0"/>
           </a:p>
@@ -19199,7 +19199,7 @@
                 <a:ea typeface="Malgun Gothic" pitchFamily="34" charset="-122"/>
                 <a:cs typeface="Malgun Gothic" pitchFamily="34" charset="-120"/>
               </a:rPr>
-              <a:t>OGAREN  ·  SLEEPER  ·  NOOER  ·  TODDLZ</a:t>
+              <a:t>OGAREN  ·  SLEEPER  ·  nooer  ·  Toddles</a:t>
             </a:r>
             <a:endParaRPr lang="en-US" sz="800" dirty="0"/>
           </a:p>
@@ -20704,7 +20704,7 @@
                 <a:ea typeface="Malgun Gothic" pitchFamily="34" charset="-122"/>
                 <a:cs typeface="Malgun Gothic" pitchFamily="34" charset="-120"/>
               </a:rPr>
-              <a:t>OGAREN  ·  SLEEPER  ·  NOOER  ·  TODDLZ</a:t>
+              <a:t>OGAREN  ·  SLEEPER  ·  nooer  ·  Toddles</a:t>
             </a:r>
             <a:endParaRPr lang="en-US" sz="800" dirty="0"/>
           </a:p>
@@ -21682,7 +21682,7 @@
                 <a:ea typeface="Malgun Gothic" pitchFamily="34" charset="-122"/>
                 <a:cs typeface="Malgun Gothic" pitchFamily="34" charset="-120"/>
               </a:rPr>
-              <a:t>OGAREN  ·  SLEEPER  ·  NOOER  ·  TODDLZ</a:t>
+              <a:t>OGAREN  ·  SLEEPER  ·  nooer  ·  Toddles</a:t>
             </a:r>
             <a:endParaRPr lang="en-US" sz="800" dirty="0"/>
           </a:p>
@@ -22588,7 +22588,7 @@
                 <a:ea typeface="Malgun Gothic" pitchFamily="34" charset="-122"/>
                 <a:cs typeface="Malgun Gothic" pitchFamily="34" charset="-120"/>
               </a:rPr>
-              <a:t>OGAREN  ·  SLEEPER  ·  NOOER  ·  TODDLZ</a:t>
+              <a:t>OGAREN  ·  SLEEPER  ·  nooer  ·  Toddles</a:t>
             </a:r>
             <a:endParaRPr lang="en-US" sz="800" dirty="0"/>
           </a:p>
@@ -23689,7 +23689,7 @@
                 <a:ea typeface="Malgun Gothic" pitchFamily="34" charset="-122"/>
                 <a:cs typeface="Malgun Gothic" pitchFamily="34" charset="-120"/>
               </a:rPr>
-              <a:t>OGAREN  ·  SLEEPER  ·  NOOER  ·  TODDLZ</a:t>
+              <a:t>OGAREN  ·  SLEEPER  ·  nooer  ·  Toddles</a:t>
             </a:r>
             <a:endParaRPr lang="en-US" sz="800" dirty="0"/>
           </a:p>
@@ -24957,7 +24957,7 @@
                 <a:ea typeface="Malgun Gothic" pitchFamily="34" charset="-122"/>
                 <a:cs typeface="Malgun Gothic" pitchFamily="34" charset="-120"/>
               </a:rPr>
-              <a:t>OGAREN  ·  SLEEPER  ·  NOOER  ·  TODDLZ</a:t>
+              <a:t>OGAREN  ·  SLEEPER  ·  nooer  ·  Toddles</a:t>
             </a:r>
             <a:endParaRPr lang="en-US" sz="800" dirty="0"/>
           </a:p>
@@ -27271,7 +27271,7 @@
                 <a:ea typeface="Malgun Gothic" pitchFamily="34" charset="-122"/>
                 <a:cs typeface="Malgun Gothic" pitchFamily="34" charset="-120"/>
               </a:rPr>
-              <a:t>OGAREN  ·  SLEEPER  ·  NOOER  ·  TODDLZ</a:t>
+              <a:t>OGAREN  ·  SLEEPER  ·  nooer  ·  Toddles</a:t>
             </a:r>
             <a:endParaRPr lang="en-US" sz="800" dirty="0"/>
           </a:p>
@@ -28567,7 +28567,7 @@
                 <a:ea typeface="Malgun Gothic" pitchFamily="34" charset="-122"/>
                 <a:cs typeface="Malgun Gothic" pitchFamily="34" charset="-120"/>
               </a:rPr>
-              <a:t>OGAREN  ·  SLEEPER  ·  NOOER  ·  TODDLZ</a:t>
+              <a:t>OGAREN  ·  SLEEPER  ·  nooer  ·  Toddles</a:t>
             </a:r>
             <a:endParaRPr lang="en-US" sz="800" dirty="0"/>
           </a:p>
@@ -29748,7 +29748,7 @@
                 <a:ea typeface="Malgun Gothic" pitchFamily="34" charset="-122"/>
                 <a:cs typeface="Malgun Gothic" pitchFamily="34" charset="-120"/>
               </a:rPr>
-              <a:t>OGAREN  ·  SLEEPER  ·  NOOER  ·  TODDLZ</a:t>
+              <a:t>OGAREN  ·  SLEEPER  ·  nooer  ·  Toddles</a:t>
             </a:r>
             <a:endParaRPr lang="en-US" sz="800" dirty="0"/>
           </a:p>
@@ -31268,7 +31268,7 @@
                 <a:ea typeface="Malgun Gothic" pitchFamily="34" charset="-122"/>
                 <a:cs typeface="Malgun Gothic" pitchFamily="34" charset="-120"/>
               </a:rPr>
-              <a:t>OGAREN  ·  SLEEPER  ·  NOOER  ·  TODDLZ</a:t>
+              <a:t>OGAREN  ·  SLEEPER  ·  nooer  ·  Toddles</a:t>
             </a:r>
             <a:endParaRPr lang="en-US" sz="800" dirty="0"/>
           </a:p>
@@ -32905,7 +32905,7 @@
                 <a:ea typeface="Malgun Gothic" pitchFamily="34" charset="-122"/>
                 <a:cs typeface="Malgun Gothic" pitchFamily="34" charset="-120"/>
               </a:rPr>
-              <a:t>OGAREN  ·  SLEEPER  ·  NOOER  ·  TODDLZ</a:t>
+              <a:t>OGAREN  ·  SLEEPER  ·  nooer  ·  Toddles</a:t>
             </a:r>
             <a:endParaRPr lang="en-US" sz="800" dirty="0"/>
           </a:p>
@@ -34510,7 +34510,7 @@
                 <a:ea typeface="Malgun Gothic" pitchFamily="34" charset="-122"/>
                 <a:cs typeface="Malgun Gothic" pitchFamily="34" charset="-120"/>
               </a:rPr>
-              <a:t>OGAREN  ·  SLEEPER  ·  NOOER  ·  TODDLZ</a:t>
+              <a:t>OGAREN  ·  SLEEPER  ·  nooer  ·  Toddles</a:t>
             </a:r>
             <a:endParaRPr lang="en-US" sz="800" dirty="0"/>
           </a:p>
@@ -34757,7 +34757,7 @@
                 <a:ea typeface="Malgun Gothic" pitchFamily="34" charset="-122"/>
                 <a:cs typeface="Malgun Gothic" pitchFamily="34" charset="-120"/>
               </a:rPr>
-              <a:t>SLEEPER  ·  NOOER  ·  TODDLZ  ·  OGAREN</a:t>
+              <a:t>SLEEPER  ·  nooer  ·  Toddles  ·  OGAREN</a:t>
             </a:r>
             <a:endParaRPr lang="en-US" sz="1200" dirty="0"/>
           </a:p>
@@ -36478,7 +36478,7 @@
                 <a:ea typeface="Malgun Gothic" pitchFamily="34" charset="-122"/>
                 <a:cs typeface="Malgun Gothic" pitchFamily="34" charset="-120"/>
               </a:rPr>
-              <a:t>OGAREN  ·  SLEEPER  ·  NOOER  ·  TODDLZ</a:t>
+              <a:t>OGAREN  ·  SLEEPER  ·  nooer  ·  Toddles</a:t>
             </a:r>
             <a:endParaRPr lang="en-US" sz="800" dirty="0"/>
           </a:p>
@@ -37774,7 +37774,7 @@
                 <a:ea typeface="Malgun Gothic" pitchFamily="34" charset="-122"/>
                 <a:cs typeface="Malgun Gothic" pitchFamily="34" charset="-120"/>
               </a:rPr>
-              <a:t>OGAREN  ·  SLEEPER  ·  NOOER  ·  TODDLZ</a:t>
+              <a:t>OGAREN  ·  SLEEPER  ·  nooer  ·  Toddles</a:t>
             </a:r>
             <a:endParaRPr lang="en-US" sz="800" dirty="0"/>
           </a:p>
@@ -38691,7 +38691,7 @@
                 <a:ea typeface="Malgun Gothic" pitchFamily="34" charset="-122"/>
                 <a:cs typeface="Malgun Gothic" pitchFamily="34" charset="-120"/>
               </a:rPr>
-              <a:t>OGAREN  ·  SLEEPER  ·  NOOER  ·  TODDLZ</a:t>
+              <a:t>OGAREN  ·  SLEEPER  ·  nooer  ·  Toddles</a:t>
             </a:r>
             <a:endParaRPr lang="en-US" sz="800" dirty="0"/>
           </a:p>
@@ -39749,7 +39749,7 @@
                 <a:ea typeface="Malgun Gothic" pitchFamily="34" charset="-122"/>
                 <a:cs typeface="Malgun Gothic" pitchFamily="34" charset="-120"/>
               </a:rPr>
-              <a:t>OGAREN  ·  SLEEPER  ·  NOOER  ·  TODDLZ</a:t>
+              <a:t>OGAREN  ·  SLEEPER  ·  nooer  ·  Toddles</a:t>
             </a:r>
             <a:endParaRPr lang="en-US" sz="800" dirty="0"/>
           </a:p>
@@ -40694,7 +40694,7 @@
                 <a:ea typeface="Malgun Gothic" pitchFamily="34" charset="-122"/>
                 <a:cs typeface="Malgun Gothic" pitchFamily="34" charset="-120"/>
               </a:rPr>
-              <a:t>OGAREN  ·  SLEEPER  ·  NOOER  ·  TODDLZ</a:t>
+              <a:t>OGAREN  ·  SLEEPER  ·  nooer  ·  Toddles</a:t>
             </a:r>
             <a:endParaRPr lang="en-US" sz="800" dirty="0"/>
           </a:p>

--- a/assets/download/오가렌_세일즈가이드_세션2.pptx
+++ b/assets/download/오가렌_세일즈가이드_세션2.pptx
@@ -4399,7 +4399,7 @@
                 <a:ea typeface="Malgun Gothic" pitchFamily="34" charset="-122"/>
                 <a:cs typeface="Malgun Gothic" pitchFamily="34" charset="-120"/>
               </a:rPr>
-              <a:t>세션 2  ·  그래서 잘 판다</a:t>
+              <a:t>세션 2  ·  그래서 잘 안내한다</a:t>
             </a:r>
             <a:endParaRPr lang="en-US" sz="1000" dirty="0"/>
           </a:p>

--- a/assets/download/오가렌_세일즈가이드_세션2.pptx
+++ b/assets/download/오가렌_세일즈가이드_세션2.pptx
@@ -4540,7 +4540,7 @@
               <a:buNone/>
             </a:pPr>
             <a:r>
-              <a:rPr lang="en-US" sz="1300" b="1" i="1" dirty="0">
+              <a:rPr lang="en-US" sz="1300" b="1" dirty="0">
                 <a:solidFill>
                   <a:srgbClr val="8E6E47"/>
                 </a:solidFill>
@@ -5531,7 +5531,7 @@
               <a:buNone/>
             </a:pPr>
             <a:r>
-              <a:rPr lang="en-US" sz="1500" i="1" dirty="0">
+              <a:rPr lang="en-US" sz="1500" dirty="0">
                 <a:solidFill>
                   <a:srgbClr val="DAD2C4"/>
                 </a:solidFill>
@@ -5744,7 +5744,7 @@
               <a:buNone/>
             </a:pPr>
             <a:r>
-              <a:rPr lang="en-US" sz="1300" i="1" dirty="0">
+              <a:rPr lang="en-US" sz="1300" dirty="0">
                 <a:solidFill>
                   <a:srgbClr val="2D2926"/>
                 </a:solidFill>
@@ -5886,7 +5886,7 @@
               <a:buNone/>
             </a:pPr>
             <a:r>
-              <a:rPr lang="en-US" sz="1300" i="1" dirty="0">
+              <a:rPr lang="en-US" sz="1300" dirty="0">
                 <a:solidFill>
                   <a:srgbClr val="2D2926"/>
                 </a:solidFill>
@@ -6028,7 +6028,7 @@
               <a:buNone/>
             </a:pPr>
             <a:r>
-              <a:rPr lang="en-US" sz="1300" i="1" dirty="0">
+              <a:rPr lang="en-US" sz="1300" dirty="0">
                 <a:solidFill>
                   <a:srgbClr val="2D2926"/>
                 </a:solidFill>
@@ -6170,7 +6170,7 @@
               <a:buNone/>
             </a:pPr>
             <a:r>
-              <a:rPr lang="en-US" sz="1300" i="1" dirty="0">
+              <a:rPr lang="en-US" sz="1300" dirty="0">
                 <a:solidFill>
                   <a:srgbClr val="2D2926"/>
                 </a:solidFill>
@@ -6312,7 +6312,7 @@
               <a:buNone/>
             </a:pPr>
             <a:r>
-              <a:rPr lang="en-US" sz="1300" i="1" dirty="0">
+              <a:rPr lang="en-US" sz="1300" dirty="0">
                 <a:solidFill>
                   <a:srgbClr val="2D2926"/>
                 </a:solidFill>
@@ -6454,7 +6454,7 @@
               <a:buNone/>
             </a:pPr>
             <a:r>
-              <a:rPr lang="en-US" sz="1300" i="1" dirty="0">
+              <a:rPr lang="en-US" sz="1300" dirty="0">
                 <a:solidFill>
                   <a:srgbClr val="2D2926"/>
                 </a:solidFill>
@@ -6596,7 +6596,7 @@
               <a:buNone/>
             </a:pPr>
             <a:r>
-              <a:rPr lang="en-US" sz="1300" i="1" dirty="0">
+              <a:rPr lang="en-US" sz="1300" dirty="0">
                 <a:solidFill>
                   <a:srgbClr val="2D2926"/>
                 </a:solidFill>
@@ -6901,7 +6901,7 @@
               <a:buNone/>
             </a:pPr>
             <a:r>
-              <a:rPr lang="en-US" sz="1300" b="1" i="1" dirty="0">
+              <a:rPr lang="en-US" sz="1300" b="1" dirty="0">
                 <a:solidFill>
                   <a:srgbClr val="B8956A"/>
                 </a:solidFill>
@@ -7004,7 +7004,7 @@
               <a:buNone/>
             </a:pPr>
             <a:r>
-              <a:rPr lang="en-US" sz="1100" i="1" dirty="0">
+              <a:rPr lang="en-US" sz="1100" dirty="0">
                 <a:solidFill>
                   <a:srgbClr val="5B544C"/>
                 </a:solidFill>
@@ -7021,7 +7021,7 @@
               <a:buNone/>
             </a:pPr>
             <a:r>
-              <a:rPr lang="en-US" sz="1100" i="1" dirty="0">
+              <a:rPr lang="en-US" sz="1100" dirty="0">
                 <a:solidFill>
                   <a:srgbClr val="5B544C"/>
                 </a:solidFill>
@@ -7038,7 +7038,7 @@
               <a:buNone/>
             </a:pPr>
             <a:r>
-              <a:rPr lang="en-US" sz="1100" i="1" dirty="0">
+              <a:rPr lang="en-US" sz="1100" dirty="0">
                 <a:solidFill>
                   <a:srgbClr val="5B544C"/>
                 </a:solidFill>
@@ -7141,7 +7141,7 @@
               <a:buNone/>
             </a:pPr>
             <a:r>
-              <a:rPr lang="en-US" sz="1100" i="1" dirty="0">
+              <a:rPr lang="en-US" sz="1100" dirty="0">
                 <a:solidFill>
                   <a:srgbClr val="2D2926"/>
                 </a:solidFill>
@@ -7158,7 +7158,7 @@
               <a:buNone/>
             </a:pPr>
             <a:r>
-              <a:rPr lang="en-US" sz="1100" i="1" dirty="0">
+              <a:rPr lang="en-US" sz="1100" dirty="0">
                 <a:solidFill>
                   <a:srgbClr val="2D2926"/>
                 </a:solidFill>
@@ -7175,7 +7175,7 @@
               <a:buNone/>
             </a:pPr>
             <a:r>
-              <a:rPr lang="en-US" sz="1100" i="1" dirty="0">
+              <a:rPr lang="en-US" sz="1100" dirty="0">
                 <a:solidFill>
                   <a:srgbClr val="2D2926"/>
                 </a:solidFill>
@@ -7578,7 +7578,7 @@
               <a:buNone/>
             </a:pPr>
             <a:r>
-              <a:rPr lang="en-US" sz="1300" b="1" i="1" dirty="0">
+              <a:rPr lang="en-US" sz="1300" b="1" dirty="0">
                 <a:solidFill>
                   <a:srgbClr val="B8956A"/>
                 </a:solidFill>
@@ -7681,7 +7681,7 @@
               <a:buNone/>
             </a:pPr>
             <a:r>
-              <a:rPr lang="en-US" sz="1100" i="1" dirty="0">
+              <a:rPr lang="en-US" sz="1100" dirty="0">
                 <a:solidFill>
                   <a:srgbClr val="5B544C"/>
                 </a:solidFill>
@@ -7698,7 +7698,7 @@
               <a:buNone/>
             </a:pPr>
             <a:r>
-              <a:rPr lang="en-US" sz="1100" i="1" dirty="0">
+              <a:rPr lang="en-US" sz="1100" dirty="0">
                 <a:solidFill>
                   <a:srgbClr val="5B544C"/>
                 </a:solidFill>
@@ -7715,7 +7715,7 @@
               <a:buNone/>
             </a:pPr>
             <a:r>
-              <a:rPr lang="en-US" sz="1100" i="1" dirty="0">
+              <a:rPr lang="en-US" sz="1100" dirty="0">
                 <a:solidFill>
                   <a:srgbClr val="5B544C"/>
                 </a:solidFill>
@@ -7818,7 +7818,7 @@
               <a:buNone/>
             </a:pPr>
             <a:r>
-              <a:rPr lang="en-US" sz="1100" i="1" dirty="0">
+              <a:rPr lang="en-US" sz="1100" dirty="0">
                 <a:solidFill>
                   <a:srgbClr val="2D2926"/>
                 </a:solidFill>
@@ -7835,7 +7835,7 @@
               <a:buNone/>
             </a:pPr>
             <a:r>
-              <a:rPr lang="en-US" sz="1100" i="1" dirty="0">
+              <a:rPr lang="en-US" sz="1100" dirty="0">
                 <a:solidFill>
                   <a:srgbClr val="2D2926"/>
                 </a:solidFill>
@@ -8238,7 +8238,7 @@
               <a:buNone/>
             </a:pPr>
             <a:r>
-              <a:rPr lang="en-US" sz="1300" b="1" i="1" dirty="0">
+              <a:rPr lang="en-US" sz="1300" b="1" dirty="0">
                 <a:solidFill>
                   <a:srgbClr val="B8956A"/>
                 </a:solidFill>
@@ -8341,7 +8341,7 @@
               <a:buNone/>
             </a:pPr>
             <a:r>
-              <a:rPr lang="en-US" sz="1100" i="1" dirty="0">
+              <a:rPr lang="en-US" sz="1100" dirty="0">
                 <a:solidFill>
                   <a:srgbClr val="5B544C"/>
                 </a:solidFill>
@@ -8358,7 +8358,7 @@
               <a:buNone/>
             </a:pPr>
             <a:r>
-              <a:rPr lang="en-US" sz="1100" i="1" dirty="0">
+              <a:rPr lang="en-US" sz="1100" dirty="0">
                 <a:solidFill>
                   <a:srgbClr val="5B544C"/>
                 </a:solidFill>
@@ -8461,7 +8461,7 @@
               <a:buNone/>
             </a:pPr>
             <a:r>
-              <a:rPr lang="en-US" sz="1100" i="1" dirty="0">
+              <a:rPr lang="en-US" sz="1100" dirty="0">
                 <a:solidFill>
                   <a:srgbClr val="2D2926"/>
                 </a:solidFill>
@@ -8478,7 +8478,7 @@
               <a:buNone/>
             </a:pPr>
             <a:r>
-              <a:rPr lang="en-US" sz="1100" i="1" dirty="0">
+              <a:rPr lang="en-US" sz="1100" dirty="0">
                 <a:solidFill>
                   <a:srgbClr val="2D2926"/>
                 </a:solidFill>
@@ -8881,7 +8881,7 @@
               <a:buNone/>
             </a:pPr>
             <a:r>
-              <a:rPr lang="en-US" sz="1300" b="1" i="1" dirty="0">
+              <a:rPr lang="en-US" sz="1300" b="1" dirty="0">
                 <a:solidFill>
                   <a:srgbClr val="B8956A"/>
                 </a:solidFill>
@@ -8984,7 +8984,7 @@
               <a:buNone/>
             </a:pPr>
             <a:r>
-              <a:rPr lang="en-US" sz="1100" i="1" dirty="0">
+              <a:rPr lang="en-US" sz="1100" dirty="0">
                 <a:solidFill>
                   <a:srgbClr val="5B544C"/>
                 </a:solidFill>
@@ -9001,7 +9001,7 @@
               <a:buNone/>
             </a:pPr>
             <a:r>
-              <a:rPr lang="en-US" sz="1100" i="1" dirty="0">
+              <a:rPr lang="en-US" sz="1100" dirty="0">
                 <a:solidFill>
                   <a:srgbClr val="5B544C"/>
                 </a:solidFill>
@@ -9018,7 +9018,7 @@
               <a:buNone/>
             </a:pPr>
             <a:r>
-              <a:rPr lang="en-US" sz="1100" i="1" dirty="0">
+              <a:rPr lang="en-US" sz="1100" dirty="0">
                 <a:solidFill>
                   <a:srgbClr val="5B544C"/>
                 </a:solidFill>
@@ -9121,7 +9121,7 @@
               <a:buNone/>
             </a:pPr>
             <a:r>
-              <a:rPr lang="en-US" sz="1100" i="1" dirty="0">
+              <a:rPr lang="en-US" sz="1100" dirty="0">
                 <a:solidFill>
                   <a:srgbClr val="2D2926"/>
                 </a:solidFill>
@@ -9138,7 +9138,7 @@
               <a:buNone/>
             </a:pPr>
             <a:r>
-              <a:rPr lang="en-US" sz="1100" i="1" dirty="0">
+              <a:rPr lang="en-US" sz="1100" dirty="0">
                 <a:solidFill>
                   <a:srgbClr val="2D2926"/>
                 </a:solidFill>
@@ -9541,7 +9541,7 @@
               <a:buNone/>
             </a:pPr>
             <a:r>
-              <a:rPr lang="en-US" sz="1300" b="1" i="1" dirty="0">
+              <a:rPr lang="en-US" sz="1300" b="1" dirty="0">
                 <a:solidFill>
                   <a:srgbClr val="B8956A"/>
                 </a:solidFill>
@@ -9644,7 +9644,7 @@
               <a:buNone/>
             </a:pPr>
             <a:r>
-              <a:rPr lang="en-US" sz="1100" i="1" dirty="0">
+              <a:rPr lang="en-US" sz="1100" dirty="0">
                 <a:solidFill>
                   <a:srgbClr val="5B544C"/>
                 </a:solidFill>
@@ -9661,7 +9661,7 @@
               <a:buNone/>
             </a:pPr>
             <a:r>
-              <a:rPr lang="en-US" sz="1100" i="1" dirty="0">
+              <a:rPr lang="en-US" sz="1100" dirty="0">
                 <a:solidFill>
                   <a:srgbClr val="5B544C"/>
                 </a:solidFill>
@@ -9678,7 +9678,7 @@
               <a:buNone/>
             </a:pPr>
             <a:r>
-              <a:rPr lang="en-US" sz="1100" i="1" dirty="0">
+              <a:rPr lang="en-US" sz="1100" dirty="0">
                 <a:solidFill>
                   <a:srgbClr val="5B544C"/>
                 </a:solidFill>
@@ -9781,7 +9781,7 @@
               <a:buNone/>
             </a:pPr>
             <a:r>
-              <a:rPr lang="en-US" sz="1100" i="1" dirty="0">
+              <a:rPr lang="en-US" sz="1100" dirty="0">
                 <a:solidFill>
                   <a:srgbClr val="2D2926"/>
                 </a:solidFill>
@@ -10248,7 +10248,7 @@
               <a:buNone/>
             </a:pPr>
             <a:r>
-              <a:rPr lang="en-US" sz="1100" i="1" dirty="0">
+              <a:rPr lang="en-US" sz="1100" dirty="0">
                 <a:solidFill>
                   <a:srgbClr val="5B544C"/>
                 </a:solidFill>
@@ -10265,7 +10265,7 @@
               <a:buNone/>
             </a:pPr>
             <a:r>
-              <a:rPr lang="en-US" sz="1100" i="1" dirty="0">
+              <a:rPr lang="en-US" sz="1100" dirty="0">
                 <a:solidFill>
                   <a:srgbClr val="5B544C"/>
                 </a:solidFill>
@@ -10304,7 +10304,7 @@
               <a:buNone/>
             </a:pPr>
             <a:r>
-              <a:rPr lang="en-US" sz="1100" b="1" i="1" dirty="0">
+              <a:rPr lang="en-US" sz="1100" b="1" dirty="0">
                 <a:solidFill>
                   <a:srgbClr val="8E6E47"/>
                 </a:solidFill>
@@ -10407,7 +10407,7 @@
               <a:buNone/>
             </a:pPr>
             <a:r>
-              <a:rPr lang="en-US" sz="1100" i="1" dirty="0">
+              <a:rPr lang="en-US" sz="1100" dirty="0">
                 <a:solidFill>
                   <a:srgbClr val="5B544C"/>
                 </a:solidFill>
@@ -10424,7 +10424,7 @@
               <a:buNone/>
             </a:pPr>
             <a:r>
-              <a:rPr lang="en-US" sz="1100" i="1" dirty="0">
+              <a:rPr lang="en-US" sz="1100" dirty="0">
                 <a:solidFill>
                   <a:srgbClr val="5B544C"/>
                 </a:solidFill>
@@ -10463,7 +10463,7 @@
               <a:buNone/>
             </a:pPr>
             <a:r>
-              <a:rPr lang="en-US" sz="1100" b="1" i="1" dirty="0">
+              <a:rPr lang="en-US" sz="1100" b="1" dirty="0">
                 <a:solidFill>
                   <a:srgbClr val="8E6E47"/>
                 </a:solidFill>
@@ -10896,7 +10896,7 @@
               <a:buNone/>
             </a:pPr>
             <a:r>
-              <a:rPr lang="en-US" sz="1200" i="1" dirty="0">
+              <a:rPr lang="en-US" sz="1200" dirty="0">
                 <a:solidFill>
                   <a:srgbClr val="8E6E47"/>
                 </a:solidFill>
@@ -11102,7 +11102,7 @@
               <a:buNone/>
             </a:pPr>
             <a:r>
-              <a:rPr lang="en-US" sz="1200" i="1" dirty="0">
+              <a:rPr lang="en-US" sz="1200" dirty="0">
                 <a:solidFill>
                   <a:srgbClr val="8E6E47"/>
                 </a:solidFill>
@@ -11308,7 +11308,7 @@
               <a:buNone/>
             </a:pPr>
             <a:r>
-              <a:rPr lang="en-US" sz="1200" i="1" dirty="0">
+              <a:rPr lang="en-US" sz="1200" dirty="0">
                 <a:solidFill>
                   <a:srgbClr val="8E6E47"/>
                 </a:solidFill>
@@ -11347,7 +11347,7 @@
               <a:buNone/>
             </a:pPr>
             <a:r>
-              <a:rPr lang="en-US" sz="1100" i="1" dirty="0">
+              <a:rPr lang="en-US" sz="1100" dirty="0">
                 <a:solidFill>
                   <a:srgbClr val="8E6E47"/>
                 </a:solidFill>
@@ -12249,7 +12249,7 @@
               <a:buNone/>
             </a:pPr>
             <a:r>
-              <a:rPr lang="en-US" sz="1100" i="1" dirty="0">
+              <a:rPr lang="en-US" sz="1100" dirty="0">
                 <a:solidFill>
                   <a:srgbClr val="8E6E47"/>
                 </a:solidFill>
@@ -12540,7 +12540,7 @@
               <a:buNone/>
             </a:pPr>
             <a:r>
-              <a:rPr lang="en-US" sz="1500" i="1" dirty="0">
+              <a:rPr lang="en-US" sz="1500" dirty="0">
                 <a:solidFill>
                   <a:srgbClr val="DAD2C4"/>
                 </a:solidFill>
@@ -13858,7 +13858,7 @@
               <a:buNone/>
             </a:pPr>
             <a:r>
-              <a:rPr lang="en-US" sz="1100" i="1" dirty="0">
+              <a:rPr lang="en-US" sz="1100" dirty="0">
                 <a:solidFill>
                   <a:srgbClr val="8E6E47"/>
                 </a:solidFill>
@@ -14344,7 +14344,7 @@
               <a:buNone/>
             </a:pPr>
             <a:r>
-              <a:rPr lang="en-US" sz="1050" i="1" dirty="0">
+              <a:rPr lang="en-US" sz="1050" dirty="0">
                 <a:solidFill>
                   <a:srgbClr val="FFFFFF"/>
                 </a:solidFill>
@@ -14361,7 +14361,7 @@
               <a:buNone/>
             </a:pPr>
             <a:r>
-              <a:rPr lang="en-US" sz="1050" i="1" dirty="0">
+              <a:rPr lang="en-US" sz="1050" dirty="0">
                 <a:solidFill>
                   <a:srgbClr val="FFFFFF"/>
                 </a:solidFill>
@@ -15334,7 +15334,7 @@
               <a:buNone/>
             </a:pPr>
             <a:r>
-              <a:rPr lang="en-US" sz="1050" i="1" dirty="0">
+              <a:rPr lang="en-US" sz="1050" dirty="0">
                 <a:solidFill>
                   <a:srgbClr val="FAF6EF"/>
                 </a:solidFill>
@@ -15351,7 +15351,7 @@
               <a:buNone/>
             </a:pPr>
             <a:r>
-              <a:rPr lang="en-US" sz="1050" i="1" dirty="0">
+              <a:rPr lang="en-US" sz="1050" dirty="0">
                 <a:solidFill>
                   <a:srgbClr val="FAF6EF"/>
                 </a:solidFill>
@@ -16104,7 +16104,7 @@
               <a:buNone/>
             </a:pPr>
             <a:r>
-              <a:rPr lang="en-US" sz="1200" i="1" dirty="0">
+              <a:rPr lang="en-US" sz="1200" dirty="0">
                 <a:solidFill>
                   <a:srgbClr val="5B544C"/>
                 </a:solidFill>
@@ -16978,7 +16978,7 @@
               <a:buNone/>
             </a:pPr>
             <a:r>
-              <a:rPr lang="en-US" sz="900" i="1" dirty="0">
+              <a:rPr lang="en-US" sz="900" dirty="0">
                 <a:solidFill>
                   <a:srgbClr val="8E867C"/>
                 </a:solidFill>
@@ -17542,7 +17542,7 @@
               <a:buNone/>
             </a:pPr>
             <a:r>
-              <a:rPr lang="en-US" sz="900" i="1" dirty="0">
+              <a:rPr lang="en-US" sz="900" dirty="0">
                 <a:solidFill>
                   <a:srgbClr val="5B544C"/>
                 </a:solidFill>
@@ -17559,7 +17559,7 @@
               <a:buNone/>
             </a:pPr>
             <a:r>
-              <a:rPr lang="en-US" sz="900" i="1" dirty="0">
+              <a:rPr lang="en-US" sz="900" dirty="0">
                 <a:solidFill>
                   <a:srgbClr val="5B544C"/>
                 </a:solidFill>
@@ -17576,7 +17576,7 @@
               <a:buNone/>
             </a:pPr>
             <a:r>
-              <a:rPr lang="en-US" sz="900" i="1" dirty="0">
+              <a:rPr lang="en-US" sz="900" dirty="0">
                 <a:solidFill>
                   <a:srgbClr val="5B544C"/>
                 </a:solidFill>
@@ -19074,7 +19074,7 @@
               <a:buNone/>
             </a:pPr>
             <a:r>
-              <a:rPr lang="en-US" sz="900" i="1" dirty="0">
+              <a:rPr lang="en-US" sz="900" dirty="0">
                 <a:solidFill>
                   <a:srgbClr val="8E867C"/>
                 </a:solidFill>
@@ -19340,7 +19340,7 @@
               <a:buNone/>
             </a:pPr>
             <a:r>
-              <a:rPr lang="en-US" sz="1150" i="1" dirty="0">
+              <a:rPr lang="en-US" sz="1150" dirty="0">
                 <a:solidFill>
                   <a:srgbClr val="5B544C"/>
                 </a:solidFill>
@@ -20579,7 +20579,7 @@
               <a:buNone/>
             </a:pPr>
             <a:r>
-              <a:rPr lang="en-US" sz="1050" i="1" dirty="0">
+              <a:rPr lang="en-US" sz="1050" dirty="0">
                 <a:solidFill>
                   <a:srgbClr val="B8956A"/>
                 </a:solidFill>
@@ -20895,7 +20895,7 @@
               <a:buNone/>
             </a:pPr>
             <a:r>
-              <a:rPr lang="en-US" sz="1100" i="1" dirty="0">
+              <a:rPr lang="en-US" sz="1100" dirty="0">
                 <a:solidFill>
                   <a:srgbClr val="2D2926"/>
                 </a:solidFill>
@@ -20984,7 +20984,7 @@
               <a:buNone/>
             </a:pPr>
             <a:r>
-              <a:rPr lang="en-US" sz="1100" i="1" dirty="0">
+              <a:rPr lang="en-US" sz="1100" dirty="0">
                 <a:solidFill>
                   <a:srgbClr val="2D2926"/>
                 </a:solidFill>
@@ -21073,7 +21073,7 @@
               <a:buNone/>
             </a:pPr>
             <a:r>
-              <a:rPr lang="en-US" sz="1100" i="1" dirty="0">
+              <a:rPr lang="en-US" sz="1100" dirty="0">
                 <a:solidFill>
                   <a:srgbClr val="2D2926"/>
                 </a:solidFill>
@@ -21162,7 +21162,7 @@
               <a:buNone/>
             </a:pPr>
             <a:r>
-              <a:rPr lang="en-US" sz="1100" i="1" dirty="0">
+              <a:rPr lang="en-US" sz="1100" dirty="0">
                 <a:solidFill>
                   <a:srgbClr val="2D2926"/>
                 </a:solidFill>
@@ -21251,7 +21251,7 @@
               <a:buNone/>
             </a:pPr>
             <a:r>
-              <a:rPr lang="en-US" sz="1100" i="1" dirty="0">
+              <a:rPr lang="en-US" sz="1100" dirty="0">
                 <a:solidFill>
                   <a:srgbClr val="2D2926"/>
                 </a:solidFill>
@@ -21340,7 +21340,7 @@
               <a:buNone/>
             </a:pPr>
             <a:r>
-              <a:rPr lang="en-US" sz="1100" i="1" dirty="0">
+              <a:rPr lang="en-US" sz="1100" dirty="0">
                 <a:solidFill>
                   <a:srgbClr val="2D2926"/>
                 </a:solidFill>
@@ -21429,7 +21429,7 @@
               <a:buNone/>
             </a:pPr>
             <a:r>
-              <a:rPr lang="en-US" sz="1100" i="1" dirty="0">
+              <a:rPr lang="en-US" sz="1100" dirty="0">
                 <a:solidFill>
                   <a:srgbClr val="2D2926"/>
                 </a:solidFill>
@@ -21518,7 +21518,7 @@
               <a:buNone/>
             </a:pPr>
             <a:r>
-              <a:rPr lang="en-US" sz="1100" i="1" dirty="0">
+              <a:rPr lang="en-US" sz="1100" dirty="0">
                 <a:solidFill>
                   <a:srgbClr val="2D2926"/>
                 </a:solidFill>
@@ -21557,7 +21557,7 @@
               <a:buNone/>
             </a:pPr>
             <a:r>
-              <a:rPr lang="en-US" sz="1100" b="1" i="1" dirty="0">
+              <a:rPr lang="en-US" sz="1100" b="1" dirty="0">
                 <a:solidFill>
                   <a:srgbClr val="8E6E47"/>
                 </a:solidFill>
@@ -21823,7 +21823,7 @@
               <a:buNone/>
             </a:pPr>
             <a:r>
-              <a:rPr lang="en-US" sz="1200" i="1" dirty="0">
+              <a:rPr lang="en-US" sz="1200" dirty="0">
                 <a:solidFill>
                   <a:srgbClr val="5B544C"/>
                 </a:solidFill>
@@ -22754,7 +22754,7 @@
               <a:buNone/>
             </a:pPr>
             <a:r>
-              <a:rPr lang="en-US" sz="1500" i="1" dirty="0">
+              <a:rPr lang="en-US" sz="1500" dirty="0">
                 <a:solidFill>
                   <a:srgbClr val="DAD2C4"/>
                 </a:solidFill>
@@ -24832,7 +24832,7 @@
               <a:buNone/>
             </a:pPr>
             <a:r>
-              <a:rPr lang="en-US" sz="1100" b="1" i="1" dirty="0">
+              <a:rPr lang="en-US" sz="1100" b="1" dirty="0">
                 <a:solidFill>
                   <a:srgbClr val="8E6E47"/>
                 </a:solidFill>
@@ -27146,7 +27146,7 @@
               <a:buNone/>
             </a:pPr>
             <a:r>
-              <a:rPr lang="en-US" sz="1100" i="1" dirty="0">
+              <a:rPr lang="en-US" sz="1100" dirty="0">
                 <a:solidFill>
                   <a:srgbClr val="8E6E47"/>
                 </a:solidFill>
@@ -28442,7 +28442,7 @@
               <a:buNone/>
             </a:pPr>
             <a:r>
-              <a:rPr lang="en-US" sz="1050" i="1" dirty="0">
+              <a:rPr lang="en-US" sz="1050" dirty="0">
                 <a:solidFill>
                   <a:srgbClr val="8E6E47"/>
                 </a:solidFill>
@@ -29914,7 +29914,7 @@
               <a:buNone/>
             </a:pPr>
             <a:r>
-              <a:rPr lang="en-US" sz="1500" i="1" dirty="0">
+              <a:rPr lang="en-US" sz="1500" dirty="0">
                 <a:solidFill>
                   <a:srgbClr val="DAD2C4"/>
                 </a:solidFill>
@@ -30063,7 +30063,7 @@
               <a:buNone/>
             </a:pPr>
             <a:r>
-              <a:rPr lang="en-US" sz="1200" i="1" dirty="0">
+              <a:rPr lang="en-US" sz="1200" dirty="0">
                 <a:solidFill>
                   <a:srgbClr val="5B544C"/>
                 </a:solidFill>
@@ -31126,7 +31126,7 @@
               <a:buNone/>
             </a:pPr>
             <a:r>
-              <a:rPr lang="en-US" sz="1000" i="1" dirty="0">
+              <a:rPr lang="en-US" sz="1000" dirty="0">
                 <a:solidFill>
                   <a:srgbClr val="FFFFFF"/>
                 </a:solidFill>
@@ -31143,7 +31143,7 @@
               <a:buNone/>
             </a:pPr>
             <a:r>
-              <a:rPr lang="en-US" sz="1000" i="1" dirty="0">
+              <a:rPr lang="en-US" sz="1000" dirty="0">
                 <a:solidFill>
                   <a:srgbClr val="FFFFFF"/>
                 </a:solidFill>
@@ -33046,7 +33046,7 @@
               <a:buNone/>
             </a:pPr>
             <a:r>
-              <a:rPr lang="en-US" sz="1100" i="1" dirty="0">
+              <a:rPr lang="en-US" sz="1100" dirty="0">
                 <a:solidFill>
                   <a:srgbClr val="5B544C"/>
                 </a:solidFill>
@@ -34385,7 +34385,7 @@
               <a:buNone/>
             </a:pPr>
             <a:r>
-              <a:rPr lang="en-US" sz="1000" i="1" dirty="0">
+              <a:rPr lang="en-US" sz="1000" dirty="0">
                 <a:solidFill>
                   <a:srgbClr val="8E6E47"/>
                 </a:solidFill>
@@ -34693,7 +34693,7 @@
               <a:buNone/>
             </a:pPr>
             <a:r>
-              <a:rPr lang="en-US" sz="1500" i="1" dirty="0">
+              <a:rPr lang="en-US" sz="1500" dirty="0">
                 <a:solidFill>
                   <a:srgbClr val="DAD2C4"/>
                 </a:solidFill>
@@ -34710,7 +34710,7 @@
               <a:buNone/>
             </a:pPr>
             <a:r>
-              <a:rPr lang="en-US" sz="1500" i="1" dirty="0">
+              <a:rPr lang="en-US" sz="1500" dirty="0">
                 <a:solidFill>
                   <a:srgbClr val="DAD2C4"/>
                 </a:solidFill>
@@ -34962,7 +34962,7 @@
               <a:buNone/>
             </a:pPr>
             <a:r>
-              <a:rPr lang="en-US" sz="1500" i="1" dirty="0">
+              <a:rPr lang="en-US" sz="1500" dirty="0">
                 <a:solidFill>
                   <a:srgbClr val="DAD2C4"/>
                 </a:solidFill>
@@ -35239,7 +35239,7 @@
               <a:buNone/>
             </a:pPr>
             <a:r>
-              <a:rPr lang="en-US" sz="1000" i="1" dirty="0">
+              <a:rPr lang="en-US" sz="1000" dirty="0">
                 <a:solidFill>
                   <a:srgbClr val="B8956A"/>
                 </a:solidFill>
@@ -35501,7 +35501,7 @@
               <a:buNone/>
             </a:pPr>
             <a:r>
-              <a:rPr lang="en-US" sz="1000" i="1" dirty="0">
+              <a:rPr lang="en-US" sz="1000" dirty="0">
                 <a:solidFill>
                   <a:srgbClr val="B8956A"/>
                 </a:solidFill>
@@ -35746,7 +35746,7 @@
               <a:buNone/>
             </a:pPr>
             <a:r>
-              <a:rPr lang="en-US" sz="1000" i="1" dirty="0">
+              <a:rPr lang="en-US" sz="1000" dirty="0">
                 <a:solidFill>
                   <a:srgbClr val="B8956A"/>
                 </a:solidFill>
@@ -35991,7 +35991,7 @@
               <a:buNone/>
             </a:pPr>
             <a:r>
-              <a:rPr lang="en-US" sz="1000" i="1" dirty="0">
+              <a:rPr lang="en-US" sz="1000" dirty="0">
                 <a:solidFill>
                   <a:srgbClr val="B8956A"/>
                 </a:solidFill>
@@ -36236,7 +36236,7 @@
               <a:buNone/>
             </a:pPr>
             <a:r>
-              <a:rPr lang="en-US" sz="1000" i="1" dirty="0">
+              <a:rPr lang="en-US" sz="1000" dirty="0">
                 <a:solidFill>
                   <a:srgbClr val="B8956A"/>
                 </a:solidFill>
@@ -36353,7 +36353,7 @@
               <a:buNone/>
             </a:pPr>
             <a:r>
-              <a:rPr lang="en-US" sz="1050" i="1" dirty="0">
+              <a:rPr lang="en-US" sz="1050" dirty="0">
                 <a:solidFill>
                   <a:srgbClr val="8E6E47"/>
                 </a:solidFill>
@@ -36786,7 +36786,7 @@
               <a:buNone/>
             </a:pPr>
             <a:r>
-              <a:rPr lang="en-US" sz="1000" b="1" i="1" dirty="0">
+              <a:rPr lang="en-US" sz="1000" b="1" dirty="0">
                 <a:solidFill>
                   <a:srgbClr val="8E6E47"/>
                 </a:solidFill>
@@ -36992,7 +36992,7 @@
               <a:buNone/>
             </a:pPr>
             <a:r>
-              <a:rPr lang="en-US" sz="1000" b="1" i="1" dirty="0">
+              <a:rPr lang="en-US" sz="1000" b="1" dirty="0">
                 <a:solidFill>
                   <a:srgbClr val="8E6E47"/>
                 </a:solidFill>
@@ -37198,7 +37198,7 @@
               <a:buNone/>
             </a:pPr>
             <a:r>
-              <a:rPr lang="en-US" sz="1000" b="1" i="1" dirty="0">
+              <a:rPr lang="en-US" sz="1000" b="1" dirty="0">
                 <a:solidFill>
                   <a:srgbClr val="8E6E47"/>
                 </a:solidFill>
@@ -37404,7 +37404,7 @@
               <a:buNone/>
             </a:pPr>
             <a:r>
-              <a:rPr lang="en-US" sz="1000" b="1" i="1" dirty="0">
+              <a:rPr lang="en-US" sz="1000" b="1" dirty="0">
                 <a:solidFill>
                   <a:srgbClr val="8E6E47"/>
                 </a:solidFill>
@@ -37610,7 +37610,7 @@
               <a:buNone/>
             </a:pPr>
             <a:r>
-              <a:rPr lang="en-US" sz="1000" b="1" i="1" dirty="0">
+              <a:rPr lang="en-US" sz="1000" b="1" dirty="0">
                 <a:solidFill>
                   <a:srgbClr val="8E6E47"/>
                 </a:solidFill>
@@ -37649,7 +37649,7 @@
               <a:buNone/>
             </a:pPr>
             <a:r>
-              <a:rPr lang="en-US" sz="1100" i="1" dirty="0">
+              <a:rPr lang="en-US" sz="1100" dirty="0">
                 <a:solidFill>
                   <a:srgbClr val="8E6E47"/>
                 </a:solidFill>
@@ -37915,7 +37915,7 @@
               <a:buNone/>
             </a:pPr>
             <a:r>
-              <a:rPr lang="en-US" sz="1200" i="1" dirty="0">
+              <a:rPr lang="en-US" sz="1200" dirty="0">
                 <a:solidFill>
                   <a:srgbClr val="5B544C"/>
                 </a:solidFill>
@@ -37993,7 +37993,7 @@
               <a:buNone/>
             </a:pPr>
             <a:r>
-              <a:rPr lang="en-US" sz="1200" i="1" dirty="0">
+              <a:rPr lang="en-US" sz="1200" dirty="0">
                 <a:solidFill>
                   <a:srgbClr val="2D2926"/>
                 </a:solidFill>
@@ -38110,7 +38110,7 @@
               <a:buNone/>
             </a:pPr>
             <a:r>
-              <a:rPr lang="en-US" sz="1200" i="1" dirty="0">
+              <a:rPr lang="en-US" sz="1200" dirty="0">
                 <a:solidFill>
                   <a:srgbClr val="2D2926"/>
                 </a:solidFill>
@@ -38227,7 +38227,7 @@
               <a:buNone/>
             </a:pPr>
             <a:r>
-              <a:rPr lang="en-US" sz="1200" i="1" dirty="0">
+              <a:rPr lang="en-US" sz="1200" dirty="0">
                 <a:solidFill>
                   <a:srgbClr val="2D2926"/>
                 </a:solidFill>
@@ -38344,7 +38344,7 @@
               <a:buNone/>
             </a:pPr>
             <a:r>
-              <a:rPr lang="en-US" sz="1200" i="1" dirty="0">
+              <a:rPr lang="en-US" sz="1200" dirty="0">
                 <a:solidFill>
                   <a:srgbClr val="2D2926"/>
                 </a:solidFill>
@@ -38461,7 +38461,7 @@
               <a:buNone/>
             </a:pPr>
             <a:r>
-              <a:rPr lang="en-US" sz="1200" i="1" dirty="0">
+              <a:rPr lang="en-US" sz="1200" dirty="0">
                 <a:solidFill>
                   <a:srgbClr val="2D2926"/>
                 </a:solidFill>
@@ -38832,7 +38832,7 @@
               <a:buNone/>
             </a:pPr>
             <a:r>
-              <a:rPr lang="en-US" sz="1300" i="1" dirty="0">
+              <a:rPr lang="en-US" sz="1300" dirty="0">
                 <a:solidFill>
                   <a:srgbClr val="5B544C"/>
                 </a:solidFill>
@@ -38974,7 +38974,7 @@
               <a:buNone/>
             </a:pPr>
             <a:r>
-              <a:rPr lang="en-US" sz="1150" i="1" dirty="0">
+              <a:rPr lang="en-US" sz="1150" dirty="0">
                 <a:solidFill>
                   <a:srgbClr val="8E6E47"/>
                 </a:solidFill>
@@ -39172,7 +39172,7 @@
               <a:buNone/>
             </a:pPr>
             <a:r>
-              <a:rPr lang="en-US" sz="1150" i="1" dirty="0">
+              <a:rPr lang="en-US" sz="1150" dirty="0">
                 <a:solidFill>
                   <a:srgbClr val="8E6E47"/>
                 </a:solidFill>
@@ -39370,7 +39370,7 @@
               <a:buNone/>
             </a:pPr>
             <a:r>
-              <a:rPr lang="en-US" sz="1150" i="1" dirty="0">
+              <a:rPr lang="en-US" sz="1150" dirty="0">
                 <a:solidFill>
                   <a:srgbClr val="8E6E47"/>
                 </a:solidFill>
@@ -39568,7 +39568,7 @@
               <a:buNone/>
             </a:pPr>
             <a:r>
-              <a:rPr lang="en-US" sz="1150" i="1" dirty="0">
+              <a:rPr lang="en-US" sz="1150" dirty="0">
                 <a:solidFill>
                   <a:srgbClr val="8E6E47"/>
                 </a:solidFill>
@@ -39890,7 +39890,7 @@
               <a:buNone/>
             </a:pPr>
             <a:r>
-              <a:rPr lang="en-US" sz="1400" b="1" i="1" dirty="0">
+              <a:rPr lang="en-US" sz="1400" b="1" dirty="0">
                 <a:solidFill>
                   <a:srgbClr val="8E6E47"/>
                 </a:solidFill>
@@ -40018,7 +40018,7 @@
               <a:buNone/>
             </a:pPr>
             <a:r>
-              <a:rPr lang="en-US" sz="1150" i="1" dirty="0">
+              <a:rPr lang="en-US" sz="1150" dirty="0">
                 <a:solidFill>
                   <a:srgbClr val="2D2926"/>
                 </a:solidFill>
@@ -40146,7 +40146,7 @@
               <a:buNone/>
             </a:pPr>
             <a:r>
-              <a:rPr lang="en-US" sz="1150" i="1" dirty="0">
+              <a:rPr lang="en-US" sz="1150" dirty="0">
                 <a:solidFill>
                   <a:srgbClr val="2D2926"/>
                 </a:solidFill>
@@ -40274,7 +40274,7 @@
               <a:buNone/>
             </a:pPr>
             <a:r>
-              <a:rPr lang="en-US" sz="1150" i="1" dirty="0">
+              <a:rPr lang="en-US" sz="1150" dirty="0">
                 <a:solidFill>
                   <a:srgbClr val="2D2926"/>
                 </a:solidFill>
@@ -40402,7 +40402,7 @@
               <a:buNone/>
             </a:pPr>
             <a:r>
-              <a:rPr lang="en-US" sz="1150" i="1" dirty="0">
+              <a:rPr lang="en-US" sz="1150" dirty="0">
                 <a:solidFill>
                   <a:srgbClr val="2D2926"/>
                 </a:solidFill>
@@ -40530,7 +40530,7 @@
               <a:buNone/>
             </a:pPr>
             <a:r>
-              <a:rPr lang="en-US" sz="1150" i="1" dirty="0">
+              <a:rPr lang="en-US" sz="1150" dirty="0">
                 <a:solidFill>
                   <a:srgbClr val="2D2926"/>
                 </a:solidFill>
@@ -40569,7 +40569,7 @@
               <a:buNone/>
             </a:pPr>
             <a:r>
-              <a:rPr lang="en-US" sz="1050" i="1" dirty="0">
+              <a:rPr lang="en-US" sz="1050" dirty="0">
                 <a:solidFill>
                   <a:srgbClr val="8E6E47"/>
                 </a:solidFill>

--- a/assets/download/오가렌_세일즈가이드_세션2.pptx
+++ b/assets/download/오가렌_세일즈가이드_세션2.pptx
@@ -5531,7 +5531,7 @@
               <a:buNone/>
             </a:pPr>
             <a:r>
-              <a:rPr lang="en-US" sz="1500" dirty="0">
+              <a:rPr lang="en-US" sz="1500" b="1" dirty="0">
                 <a:solidFill>
                   <a:srgbClr val="DAD2C4"/>
                 </a:solidFill>
@@ -5744,7 +5744,7 @@
               <a:buNone/>
             </a:pPr>
             <a:r>
-              <a:rPr lang="en-US" sz="1300" dirty="0">
+              <a:rPr lang="en-US" sz="1300" b="1" dirty="0">
                 <a:solidFill>
                   <a:srgbClr val="2D2926"/>
                 </a:solidFill>
@@ -5886,7 +5886,7 @@
               <a:buNone/>
             </a:pPr>
             <a:r>
-              <a:rPr lang="en-US" sz="1300" dirty="0">
+              <a:rPr lang="en-US" sz="1300" b="1" dirty="0">
                 <a:solidFill>
                   <a:srgbClr val="2D2926"/>
                 </a:solidFill>
@@ -6028,7 +6028,7 @@
               <a:buNone/>
             </a:pPr>
             <a:r>
-              <a:rPr lang="en-US" sz="1300" dirty="0">
+              <a:rPr lang="en-US" sz="1300" b="1" dirty="0">
                 <a:solidFill>
                   <a:srgbClr val="2D2926"/>
                 </a:solidFill>
@@ -6170,7 +6170,7 @@
               <a:buNone/>
             </a:pPr>
             <a:r>
-              <a:rPr lang="en-US" sz="1300" dirty="0">
+              <a:rPr lang="en-US" sz="1300" b="1" dirty="0">
                 <a:solidFill>
                   <a:srgbClr val="2D2926"/>
                 </a:solidFill>
@@ -6312,7 +6312,7 @@
               <a:buNone/>
             </a:pPr>
             <a:r>
-              <a:rPr lang="en-US" sz="1300" dirty="0">
+              <a:rPr lang="en-US" sz="1300" b="1" dirty="0">
                 <a:solidFill>
                   <a:srgbClr val="2D2926"/>
                 </a:solidFill>
@@ -6454,7 +6454,7 @@
               <a:buNone/>
             </a:pPr>
             <a:r>
-              <a:rPr lang="en-US" sz="1300" dirty="0">
+              <a:rPr lang="en-US" sz="1300" b="1" dirty="0">
                 <a:solidFill>
                   <a:srgbClr val="2D2926"/>
                 </a:solidFill>
@@ -6596,7 +6596,7 @@
               <a:buNone/>
             </a:pPr>
             <a:r>
-              <a:rPr lang="en-US" sz="1300" dirty="0">
+              <a:rPr lang="en-US" sz="1300" b="1" dirty="0">
                 <a:solidFill>
                   <a:srgbClr val="2D2926"/>
                 </a:solidFill>
@@ -7004,7 +7004,7 @@
               <a:buNone/>
             </a:pPr>
             <a:r>
-              <a:rPr lang="en-US" sz="1100" dirty="0">
+              <a:rPr lang="en-US" sz="1100" b="1" dirty="0">
                 <a:solidFill>
                   <a:srgbClr val="5B544C"/>
                 </a:solidFill>
@@ -7021,7 +7021,7 @@
               <a:buNone/>
             </a:pPr>
             <a:r>
-              <a:rPr lang="en-US" sz="1100" dirty="0">
+              <a:rPr lang="en-US" sz="1100" b="1" dirty="0">
                 <a:solidFill>
                   <a:srgbClr val="5B544C"/>
                 </a:solidFill>
@@ -7038,7 +7038,7 @@
               <a:buNone/>
             </a:pPr>
             <a:r>
-              <a:rPr lang="en-US" sz="1100" dirty="0">
+              <a:rPr lang="en-US" sz="1100" b="1" dirty="0">
                 <a:solidFill>
                   <a:srgbClr val="5B544C"/>
                 </a:solidFill>
@@ -7141,7 +7141,7 @@
               <a:buNone/>
             </a:pPr>
             <a:r>
-              <a:rPr lang="en-US" sz="1100" dirty="0">
+              <a:rPr lang="en-US" sz="1100" b="1" dirty="0">
                 <a:solidFill>
                   <a:srgbClr val="2D2926"/>
                 </a:solidFill>
@@ -7158,7 +7158,7 @@
               <a:buNone/>
             </a:pPr>
             <a:r>
-              <a:rPr lang="en-US" sz="1100" dirty="0">
+              <a:rPr lang="en-US" sz="1100" b="1" dirty="0">
                 <a:solidFill>
                   <a:srgbClr val="2D2926"/>
                 </a:solidFill>
@@ -7175,7 +7175,7 @@
               <a:buNone/>
             </a:pPr>
             <a:r>
-              <a:rPr lang="en-US" sz="1100" dirty="0">
+              <a:rPr lang="en-US" sz="1100" b="1" dirty="0">
                 <a:solidFill>
                   <a:srgbClr val="2D2926"/>
                 </a:solidFill>
@@ -7681,7 +7681,7 @@
               <a:buNone/>
             </a:pPr>
             <a:r>
-              <a:rPr lang="en-US" sz="1100" dirty="0">
+              <a:rPr lang="en-US" sz="1100" b="1" dirty="0">
                 <a:solidFill>
                   <a:srgbClr val="5B544C"/>
                 </a:solidFill>
@@ -7698,7 +7698,7 @@
               <a:buNone/>
             </a:pPr>
             <a:r>
-              <a:rPr lang="en-US" sz="1100" dirty="0">
+              <a:rPr lang="en-US" sz="1100" b="1" dirty="0">
                 <a:solidFill>
                   <a:srgbClr val="5B544C"/>
                 </a:solidFill>
@@ -7715,7 +7715,7 @@
               <a:buNone/>
             </a:pPr>
             <a:r>
-              <a:rPr lang="en-US" sz="1100" dirty="0">
+              <a:rPr lang="en-US" sz="1100" b="1" dirty="0">
                 <a:solidFill>
                   <a:srgbClr val="5B544C"/>
                 </a:solidFill>
@@ -7818,7 +7818,7 @@
               <a:buNone/>
             </a:pPr>
             <a:r>
-              <a:rPr lang="en-US" sz="1100" dirty="0">
+              <a:rPr lang="en-US" sz="1100" b="1" dirty="0">
                 <a:solidFill>
                   <a:srgbClr val="2D2926"/>
                 </a:solidFill>
@@ -7835,7 +7835,7 @@
               <a:buNone/>
             </a:pPr>
             <a:r>
-              <a:rPr lang="en-US" sz="1100" dirty="0">
+              <a:rPr lang="en-US" sz="1100" b="1" dirty="0">
                 <a:solidFill>
                   <a:srgbClr val="2D2926"/>
                 </a:solidFill>
@@ -8341,7 +8341,7 @@
               <a:buNone/>
             </a:pPr>
             <a:r>
-              <a:rPr lang="en-US" sz="1100" dirty="0">
+              <a:rPr lang="en-US" sz="1100" b="1" dirty="0">
                 <a:solidFill>
                   <a:srgbClr val="5B544C"/>
                 </a:solidFill>
@@ -8358,7 +8358,7 @@
               <a:buNone/>
             </a:pPr>
             <a:r>
-              <a:rPr lang="en-US" sz="1100" dirty="0">
+              <a:rPr lang="en-US" sz="1100" b="1" dirty="0">
                 <a:solidFill>
                   <a:srgbClr val="5B544C"/>
                 </a:solidFill>
@@ -8461,7 +8461,7 @@
               <a:buNone/>
             </a:pPr>
             <a:r>
-              <a:rPr lang="en-US" sz="1100" dirty="0">
+              <a:rPr lang="en-US" sz="1100" b="1" dirty="0">
                 <a:solidFill>
                   <a:srgbClr val="2D2926"/>
                 </a:solidFill>
@@ -8478,7 +8478,7 @@
               <a:buNone/>
             </a:pPr>
             <a:r>
-              <a:rPr lang="en-US" sz="1100" dirty="0">
+              <a:rPr lang="en-US" sz="1100" b="1" dirty="0">
                 <a:solidFill>
                   <a:srgbClr val="2D2926"/>
                 </a:solidFill>
@@ -8984,7 +8984,7 @@
               <a:buNone/>
             </a:pPr>
             <a:r>
-              <a:rPr lang="en-US" sz="1100" dirty="0">
+              <a:rPr lang="en-US" sz="1100" b="1" dirty="0">
                 <a:solidFill>
                   <a:srgbClr val="5B544C"/>
                 </a:solidFill>
@@ -9001,7 +9001,7 @@
               <a:buNone/>
             </a:pPr>
             <a:r>
-              <a:rPr lang="en-US" sz="1100" dirty="0">
+              <a:rPr lang="en-US" sz="1100" b="1" dirty="0">
                 <a:solidFill>
                   <a:srgbClr val="5B544C"/>
                 </a:solidFill>
@@ -9018,7 +9018,7 @@
               <a:buNone/>
             </a:pPr>
             <a:r>
-              <a:rPr lang="en-US" sz="1100" dirty="0">
+              <a:rPr lang="en-US" sz="1100" b="1" dirty="0">
                 <a:solidFill>
                   <a:srgbClr val="5B544C"/>
                 </a:solidFill>
@@ -9121,7 +9121,7 @@
               <a:buNone/>
             </a:pPr>
             <a:r>
-              <a:rPr lang="en-US" sz="1100" dirty="0">
+              <a:rPr lang="en-US" sz="1100" b="1" dirty="0">
                 <a:solidFill>
                   <a:srgbClr val="2D2926"/>
                 </a:solidFill>
@@ -9138,7 +9138,7 @@
               <a:buNone/>
             </a:pPr>
             <a:r>
-              <a:rPr lang="en-US" sz="1100" dirty="0">
+              <a:rPr lang="en-US" sz="1100" b="1" dirty="0">
                 <a:solidFill>
                   <a:srgbClr val="2D2926"/>
                 </a:solidFill>
@@ -9644,7 +9644,7 @@
               <a:buNone/>
             </a:pPr>
             <a:r>
-              <a:rPr lang="en-US" sz="1100" dirty="0">
+              <a:rPr lang="en-US" sz="1100" b="1" dirty="0">
                 <a:solidFill>
                   <a:srgbClr val="5B544C"/>
                 </a:solidFill>
@@ -9661,7 +9661,7 @@
               <a:buNone/>
             </a:pPr>
             <a:r>
-              <a:rPr lang="en-US" sz="1100" dirty="0">
+              <a:rPr lang="en-US" sz="1100" b="1" dirty="0">
                 <a:solidFill>
                   <a:srgbClr val="5B544C"/>
                 </a:solidFill>
@@ -9678,7 +9678,7 @@
               <a:buNone/>
             </a:pPr>
             <a:r>
-              <a:rPr lang="en-US" sz="1100" dirty="0">
+              <a:rPr lang="en-US" sz="1100" b="1" dirty="0">
                 <a:solidFill>
                   <a:srgbClr val="5B544C"/>
                 </a:solidFill>
@@ -9781,7 +9781,7 @@
               <a:buNone/>
             </a:pPr>
             <a:r>
-              <a:rPr lang="en-US" sz="1100" dirty="0">
+              <a:rPr lang="en-US" sz="1100" b="1" dirty="0">
                 <a:solidFill>
                   <a:srgbClr val="2D2926"/>
                 </a:solidFill>
@@ -10248,7 +10248,7 @@
               <a:buNone/>
             </a:pPr>
             <a:r>
-              <a:rPr lang="en-US" sz="1100" dirty="0">
+              <a:rPr lang="en-US" sz="1100" b="1" dirty="0">
                 <a:solidFill>
                   <a:srgbClr val="5B544C"/>
                 </a:solidFill>
@@ -10265,7 +10265,7 @@
               <a:buNone/>
             </a:pPr>
             <a:r>
-              <a:rPr lang="en-US" sz="1100" dirty="0">
+              <a:rPr lang="en-US" sz="1100" b="1" dirty="0">
                 <a:solidFill>
                   <a:srgbClr val="5B544C"/>
                 </a:solidFill>
@@ -10407,7 +10407,7 @@
               <a:buNone/>
             </a:pPr>
             <a:r>
-              <a:rPr lang="en-US" sz="1100" dirty="0">
+              <a:rPr lang="en-US" sz="1100" b="1" dirty="0">
                 <a:solidFill>
                   <a:srgbClr val="5B544C"/>
                 </a:solidFill>
@@ -10424,7 +10424,7 @@
               <a:buNone/>
             </a:pPr>
             <a:r>
-              <a:rPr lang="en-US" sz="1100" dirty="0">
+              <a:rPr lang="en-US" sz="1100" b="1" dirty="0">
                 <a:solidFill>
                   <a:srgbClr val="5B544C"/>
                 </a:solidFill>
@@ -10896,7 +10896,7 @@
               <a:buNone/>
             </a:pPr>
             <a:r>
-              <a:rPr lang="en-US" sz="1200" dirty="0">
+              <a:rPr lang="en-US" sz="1200" b="1" dirty="0">
                 <a:solidFill>
                   <a:srgbClr val="8E6E47"/>
                 </a:solidFill>
@@ -11102,7 +11102,7 @@
               <a:buNone/>
             </a:pPr>
             <a:r>
-              <a:rPr lang="en-US" sz="1200" dirty="0">
+              <a:rPr lang="en-US" sz="1200" b="1" dirty="0">
                 <a:solidFill>
                   <a:srgbClr val="8E6E47"/>
                 </a:solidFill>
@@ -11308,7 +11308,7 @@
               <a:buNone/>
             </a:pPr>
             <a:r>
-              <a:rPr lang="en-US" sz="1200" dirty="0">
+              <a:rPr lang="en-US" sz="1200" b="1" dirty="0">
                 <a:solidFill>
                   <a:srgbClr val="8E6E47"/>
                 </a:solidFill>
@@ -11347,7 +11347,7 @@
               <a:buNone/>
             </a:pPr>
             <a:r>
-              <a:rPr lang="en-US" sz="1100" dirty="0">
+              <a:rPr lang="en-US" sz="1100" b="1" dirty="0">
                 <a:solidFill>
                   <a:srgbClr val="8E6E47"/>
                 </a:solidFill>
@@ -12249,7 +12249,7 @@
               <a:buNone/>
             </a:pPr>
             <a:r>
-              <a:rPr lang="en-US" sz="1100" dirty="0">
+              <a:rPr lang="en-US" sz="1100" b="1" dirty="0">
                 <a:solidFill>
                   <a:srgbClr val="8E6E47"/>
                 </a:solidFill>
@@ -12540,7 +12540,7 @@
               <a:buNone/>
             </a:pPr>
             <a:r>
-              <a:rPr lang="en-US" sz="1500" dirty="0">
+              <a:rPr lang="en-US" sz="1500" b="1" dirty="0">
                 <a:solidFill>
                   <a:srgbClr val="DAD2C4"/>
                 </a:solidFill>
@@ -13858,7 +13858,7 @@
               <a:buNone/>
             </a:pPr>
             <a:r>
-              <a:rPr lang="en-US" sz="1100" dirty="0">
+              <a:rPr lang="en-US" sz="1100" b="1" dirty="0">
                 <a:solidFill>
                   <a:srgbClr val="8E6E47"/>
                 </a:solidFill>
@@ -14344,7 +14344,7 @@
               <a:buNone/>
             </a:pPr>
             <a:r>
-              <a:rPr lang="en-US" sz="1050" dirty="0">
+              <a:rPr lang="en-US" sz="1050" b="1" dirty="0">
                 <a:solidFill>
                   <a:srgbClr val="FFFFFF"/>
                 </a:solidFill>
@@ -14361,7 +14361,7 @@
               <a:buNone/>
             </a:pPr>
             <a:r>
-              <a:rPr lang="en-US" sz="1050" dirty="0">
+              <a:rPr lang="en-US" sz="1050" b="1" dirty="0">
                 <a:solidFill>
                   <a:srgbClr val="FFFFFF"/>
                 </a:solidFill>
@@ -15334,7 +15334,7 @@
               <a:buNone/>
             </a:pPr>
             <a:r>
-              <a:rPr lang="en-US" sz="1050" dirty="0">
+              <a:rPr lang="en-US" sz="1050" b="1" dirty="0">
                 <a:solidFill>
                   <a:srgbClr val="FAF6EF"/>
                 </a:solidFill>
@@ -15351,7 +15351,7 @@
               <a:buNone/>
             </a:pPr>
             <a:r>
-              <a:rPr lang="en-US" sz="1050" dirty="0">
+              <a:rPr lang="en-US" sz="1050" b="1" dirty="0">
                 <a:solidFill>
                   <a:srgbClr val="FAF6EF"/>
                 </a:solidFill>
@@ -16104,7 +16104,7 @@
               <a:buNone/>
             </a:pPr>
             <a:r>
-              <a:rPr lang="en-US" sz="1200" dirty="0">
+              <a:rPr lang="en-US" sz="1200" b="1" dirty="0">
                 <a:solidFill>
                   <a:srgbClr val="5B544C"/>
                 </a:solidFill>
@@ -16978,7 +16978,7 @@
               <a:buNone/>
             </a:pPr>
             <a:r>
-              <a:rPr lang="en-US" sz="900" dirty="0">
+              <a:rPr lang="en-US" sz="900" b="1" dirty="0">
                 <a:solidFill>
                   <a:srgbClr val="8E867C"/>
                 </a:solidFill>
@@ -17542,7 +17542,7 @@
               <a:buNone/>
             </a:pPr>
             <a:r>
-              <a:rPr lang="en-US" sz="900" dirty="0">
+              <a:rPr lang="en-US" sz="900" b="1" dirty="0">
                 <a:solidFill>
                   <a:srgbClr val="5B544C"/>
                 </a:solidFill>
@@ -17559,7 +17559,7 @@
               <a:buNone/>
             </a:pPr>
             <a:r>
-              <a:rPr lang="en-US" sz="900" dirty="0">
+              <a:rPr lang="en-US" sz="900" b="1" dirty="0">
                 <a:solidFill>
                   <a:srgbClr val="5B544C"/>
                 </a:solidFill>
@@ -17576,7 +17576,7 @@
               <a:buNone/>
             </a:pPr>
             <a:r>
-              <a:rPr lang="en-US" sz="900" dirty="0">
+              <a:rPr lang="en-US" sz="900" b="1" dirty="0">
                 <a:solidFill>
                   <a:srgbClr val="5B544C"/>
                 </a:solidFill>
@@ -19074,7 +19074,7 @@
               <a:buNone/>
             </a:pPr>
             <a:r>
-              <a:rPr lang="en-US" sz="900" dirty="0">
+              <a:rPr lang="en-US" sz="900" b="1" dirty="0">
                 <a:solidFill>
                   <a:srgbClr val="8E867C"/>
                 </a:solidFill>
@@ -19340,7 +19340,7 @@
               <a:buNone/>
             </a:pPr>
             <a:r>
-              <a:rPr lang="en-US" sz="1150" dirty="0">
+              <a:rPr lang="en-US" sz="1150" b="1" dirty="0">
                 <a:solidFill>
                   <a:srgbClr val="5B544C"/>
                 </a:solidFill>
@@ -20579,7 +20579,7 @@
               <a:buNone/>
             </a:pPr>
             <a:r>
-              <a:rPr lang="en-US" sz="1050" dirty="0">
+              <a:rPr lang="en-US" sz="1050" b="1" dirty="0">
                 <a:solidFill>
                   <a:srgbClr val="B8956A"/>
                 </a:solidFill>
@@ -20895,7 +20895,7 @@
               <a:buNone/>
             </a:pPr>
             <a:r>
-              <a:rPr lang="en-US" sz="1100" dirty="0">
+              <a:rPr lang="en-US" sz="1100" b="1" dirty="0">
                 <a:solidFill>
                   <a:srgbClr val="2D2926"/>
                 </a:solidFill>
@@ -20984,7 +20984,7 @@
               <a:buNone/>
             </a:pPr>
             <a:r>
-              <a:rPr lang="en-US" sz="1100" dirty="0">
+              <a:rPr lang="en-US" sz="1100" b="1" dirty="0">
                 <a:solidFill>
                   <a:srgbClr val="2D2926"/>
                 </a:solidFill>
@@ -21073,7 +21073,7 @@
               <a:buNone/>
             </a:pPr>
             <a:r>
-              <a:rPr lang="en-US" sz="1100" dirty="0">
+              <a:rPr lang="en-US" sz="1100" b="1" dirty="0">
                 <a:solidFill>
                   <a:srgbClr val="2D2926"/>
                 </a:solidFill>
@@ -21162,7 +21162,7 @@
               <a:buNone/>
             </a:pPr>
             <a:r>
-              <a:rPr lang="en-US" sz="1100" dirty="0">
+              <a:rPr lang="en-US" sz="1100" b="1" dirty="0">
                 <a:solidFill>
                   <a:srgbClr val="2D2926"/>
                 </a:solidFill>
@@ -21251,7 +21251,7 @@
               <a:buNone/>
             </a:pPr>
             <a:r>
-              <a:rPr lang="en-US" sz="1100" dirty="0">
+              <a:rPr lang="en-US" sz="1100" b="1" dirty="0">
                 <a:solidFill>
                   <a:srgbClr val="2D2926"/>
                 </a:solidFill>
@@ -21340,7 +21340,7 @@
               <a:buNone/>
             </a:pPr>
             <a:r>
-              <a:rPr lang="en-US" sz="1100" dirty="0">
+              <a:rPr lang="en-US" sz="1100" b="1" dirty="0">
                 <a:solidFill>
                   <a:srgbClr val="2D2926"/>
                 </a:solidFill>
@@ -21429,7 +21429,7 @@
               <a:buNone/>
             </a:pPr>
             <a:r>
-              <a:rPr lang="en-US" sz="1100" dirty="0">
+              <a:rPr lang="en-US" sz="1100" b="1" dirty="0">
                 <a:solidFill>
                   <a:srgbClr val="2D2926"/>
                 </a:solidFill>
@@ -21518,7 +21518,7 @@
               <a:buNone/>
             </a:pPr>
             <a:r>
-              <a:rPr lang="en-US" sz="1100" dirty="0">
+              <a:rPr lang="en-US" sz="1100" b="1" dirty="0">
                 <a:solidFill>
                   <a:srgbClr val="2D2926"/>
                 </a:solidFill>
@@ -21823,7 +21823,7 @@
               <a:buNone/>
             </a:pPr>
             <a:r>
-              <a:rPr lang="en-US" sz="1200" dirty="0">
+              <a:rPr lang="en-US" sz="1200" b="1" dirty="0">
                 <a:solidFill>
                   <a:srgbClr val="5B544C"/>
                 </a:solidFill>
@@ -22754,7 +22754,7 @@
               <a:buNone/>
             </a:pPr>
             <a:r>
-              <a:rPr lang="en-US" sz="1500" dirty="0">
+              <a:rPr lang="en-US" sz="1500" b="1" dirty="0">
                 <a:solidFill>
                   <a:srgbClr val="DAD2C4"/>
                 </a:solidFill>
@@ -27146,7 +27146,7 @@
               <a:buNone/>
             </a:pPr>
             <a:r>
-              <a:rPr lang="en-US" sz="1100" dirty="0">
+              <a:rPr lang="en-US" sz="1100" b="1" dirty="0">
                 <a:solidFill>
                   <a:srgbClr val="8E6E47"/>
                 </a:solidFill>
@@ -28442,7 +28442,7 @@
               <a:buNone/>
             </a:pPr>
             <a:r>
-              <a:rPr lang="en-US" sz="1050" dirty="0">
+              <a:rPr lang="en-US" sz="1050" b="1" dirty="0">
                 <a:solidFill>
                   <a:srgbClr val="8E6E47"/>
                 </a:solidFill>
@@ -29914,7 +29914,7 @@
               <a:buNone/>
             </a:pPr>
             <a:r>
-              <a:rPr lang="en-US" sz="1500" dirty="0">
+              <a:rPr lang="en-US" sz="1500" b="1" dirty="0">
                 <a:solidFill>
                   <a:srgbClr val="DAD2C4"/>
                 </a:solidFill>
@@ -30063,7 +30063,7 @@
               <a:buNone/>
             </a:pPr>
             <a:r>
-              <a:rPr lang="en-US" sz="1200" dirty="0">
+              <a:rPr lang="en-US" sz="1200" b="1" dirty="0">
                 <a:solidFill>
                   <a:srgbClr val="5B544C"/>
                 </a:solidFill>
@@ -31126,7 +31126,7 @@
               <a:buNone/>
             </a:pPr>
             <a:r>
-              <a:rPr lang="en-US" sz="1000" dirty="0">
+              <a:rPr lang="en-US" sz="1000" b="1" dirty="0">
                 <a:solidFill>
                   <a:srgbClr val="FFFFFF"/>
                 </a:solidFill>
@@ -31143,7 +31143,7 @@
               <a:buNone/>
             </a:pPr>
             <a:r>
-              <a:rPr lang="en-US" sz="1000" dirty="0">
+              <a:rPr lang="en-US" sz="1000" b="1" dirty="0">
                 <a:solidFill>
                   <a:srgbClr val="FFFFFF"/>
                 </a:solidFill>
@@ -33046,7 +33046,7 @@
               <a:buNone/>
             </a:pPr>
             <a:r>
-              <a:rPr lang="en-US" sz="1100" dirty="0">
+              <a:rPr lang="en-US" sz="1100" b="1" dirty="0">
                 <a:solidFill>
                   <a:srgbClr val="5B544C"/>
                 </a:solidFill>
@@ -34385,7 +34385,7 @@
               <a:buNone/>
             </a:pPr>
             <a:r>
-              <a:rPr lang="en-US" sz="1000" dirty="0">
+              <a:rPr lang="en-US" sz="1000" b="1" dirty="0">
                 <a:solidFill>
                   <a:srgbClr val="8E6E47"/>
                 </a:solidFill>
@@ -34693,7 +34693,7 @@
               <a:buNone/>
             </a:pPr>
             <a:r>
-              <a:rPr lang="en-US" sz="1500" dirty="0">
+              <a:rPr lang="en-US" sz="1500" b="1" dirty="0">
                 <a:solidFill>
                   <a:srgbClr val="DAD2C4"/>
                 </a:solidFill>
@@ -34710,7 +34710,7 @@
               <a:buNone/>
             </a:pPr>
             <a:r>
-              <a:rPr lang="en-US" sz="1500" dirty="0">
+              <a:rPr lang="en-US" sz="1500" b="1" dirty="0">
                 <a:solidFill>
                   <a:srgbClr val="DAD2C4"/>
                 </a:solidFill>
@@ -34962,7 +34962,7 @@
               <a:buNone/>
             </a:pPr>
             <a:r>
-              <a:rPr lang="en-US" sz="1500" dirty="0">
+              <a:rPr lang="en-US" sz="1500" b="1" dirty="0">
                 <a:solidFill>
                   <a:srgbClr val="DAD2C4"/>
                 </a:solidFill>
@@ -35239,7 +35239,7 @@
               <a:buNone/>
             </a:pPr>
             <a:r>
-              <a:rPr lang="en-US" sz="1000" dirty="0">
+              <a:rPr lang="en-US" sz="1000" b="1" dirty="0">
                 <a:solidFill>
                   <a:srgbClr val="B8956A"/>
                 </a:solidFill>
@@ -35501,7 +35501,7 @@
               <a:buNone/>
             </a:pPr>
             <a:r>
-              <a:rPr lang="en-US" sz="1000" dirty="0">
+              <a:rPr lang="en-US" sz="1000" b="1" dirty="0">
                 <a:solidFill>
                   <a:srgbClr val="B8956A"/>
                 </a:solidFill>
@@ -35746,7 +35746,7 @@
               <a:buNone/>
             </a:pPr>
             <a:r>
-              <a:rPr lang="en-US" sz="1000" dirty="0">
+              <a:rPr lang="en-US" sz="1000" b="1" dirty="0">
                 <a:solidFill>
                   <a:srgbClr val="B8956A"/>
                 </a:solidFill>
@@ -35991,7 +35991,7 @@
               <a:buNone/>
             </a:pPr>
             <a:r>
-              <a:rPr lang="en-US" sz="1000" dirty="0">
+              <a:rPr lang="en-US" sz="1000" b="1" dirty="0">
                 <a:solidFill>
                   <a:srgbClr val="B8956A"/>
                 </a:solidFill>
@@ -36236,7 +36236,7 @@
               <a:buNone/>
             </a:pPr>
             <a:r>
-              <a:rPr lang="en-US" sz="1000" dirty="0">
+              <a:rPr lang="en-US" sz="1000" b="1" dirty="0">
                 <a:solidFill>
                   <a:srgbClr val="B8956A"/>
                 </a:solidFill>
@@ -36353,7 +36353,7 @@
               <a:buNone/>
             </a:pPr>
             <a:r>
-              <a:rPr lang="en-US" sz="1050" dirty="0">
+              <a:rPr lang="en-US" sz="1050" b="1" dirty="0">
                 <a:solidFill>
                   <a:srgbClr val="8E6E47"/>
                 </a:solidFill>
@@ -37649,7 +37649,7 @@
               <a:buNone/>
             </a:pPr>
             <a:r>
-              <a:rPr lang="en-US" sz="1100" dirty="0">
+              <a:rPr lang="en-US" sz="1100" b="1" dirty="0">
                 <a:solidFill>
                   <a:srgbClr val="8E6E47"/>
                 </a:solidFill>
@@ -37915,7 +37915,7 @@
               <a:buNone/>
             </a:pPr>
             <a:r>
-              <a:rPr lang="en-US" sz="1200" dirty="0">
+              <a:rPr lang="en-US" sz="1200" b="1" dirty="0">
                 <a:solidFill>
                   <a:srgbClr val="5B544C"/>
                 </a:solidFill>
@@ -37993,7 +37993,7 @@
               <a:buNone/>
             </a:pPr>
             <a:r>
-              <a:rPr lang="en-US" sz="1200" dirty="0">
+              <a:rPr lang="en-US" sz="1200" b="1" dirty="0">
                 <a:solidFill>
                   <a:srgbClr val="2D2926"/>
                 </a:solidFill>
@@ -38110,7 +38110,7 @@
               <a:buNone/>
             </a:pPr>
             <a:r>
-              <a:rPr lang="en-US" sz="1200" dirty="0">
+              <a:rPr lang="en-US" sz="1200" b="1" dirty="0">
                 <a:solidFill>
                   <a:srgbClr val="2D2926"/>
                 </a:solidFill>
@@ -38227,7 +38227,7 @@
               <a:buNone/>
             </a:pPr>
             <a:r>
-              <a:rPr lang="en-US" sz="1200" dirty="0">
+              <a:rPr lang="en-US" sz="1200" b="1" dirty="0">
                 <a:solidFill>
                   <a:srgbClr val="2D2926"/>
                 </a:solidFill>
@@ -38344,7 +38344,7 @@
               <a:buNone/>
             </a:pPr>
             <a:r>
-              <a:rPr lang="en-US" sz="1200" dirty="0">
+              <a:rPr lang="en-US" sz="1200" b="1" dirty="0">
                 <a:solidFill>
                   <a:srgbClr val="2D2926"/>
                 </a:solidFill>
@@ -38461,7 +38461,7 @@
               <a:buNone/>
             </a:pPr>
             <a:r>
-              <a:rPr lang="en-US" sz="1200" dirty="0">
+              <a:rPr lang="en-US" sz="1200" b="1" dirty="0">
                 <a:solidFill>
                   <a:srgbClr val="2D2926"/>
                 </a:solidFill>
@@ -38832,7 +38832,7 @@
               <a:buNone/>
             </a:pPr>
             <a:r>
-              <a:rPr lang="en-US" sz="1300" dirty="0">
+              <a:rPr lang="en-US" sz="1300" b="1" dirty="0">
                 <a:solidFill>
                   <a:srgbClr val="5B544C"/>
                 </a:solidFill>
@@ -38974,7 +38974,7 @@
               <a:buNone/>
             </a:pPr>
             <a:r>
-              <a:rPr lang="en-US" sz="1150" dirty="0">
+              <a:rPr lang="en-US" sz="1150" b="1" dirty="0">
                 <a:solidFill>
                   <a:srgbClr val="8E6E47"/>
                 </a:solidFill>
@@ -39172,7 +39172,7 @@
               <a:buNone/>
             </a:pPr>
             <a:r>
-              <a:rPr lang="en-US" sz="1150" dirty="0">
+              <a:rPr lang="en-US" sz="1150" b="1" dirty="0">
                 <a:solidFill>
                   <a:srgbClr val="8E6E47"/>
                 </a:solidFill>
@@ -39370,7 +39370,7 @@
               <a:buNone/>
             </a:pPr>
             <a:r>
-              <a:rPr lang="en-US" sz="1150" dirty="0">
+              <a:rPr lang="en-US" sz="1150" b="1" dirty="0">
                 <a:solidFill>
                   <a:srgbClr val="8E6E47"/>
                 </a:solidFill>
@@ -39568,7 +39568,7 @@
               <a:buNone/>
             </a:pPr>
             <a:r>
-              <a:rPr lang="en-US" sz="1150" dirty="0">
+              <a:rPr lang="en-US" sz="1150" b="1" dirty="0">
                 <a:solidFill>
                   <a:srgbClr val="8E6E47"/>
                 </a:solidFill>
@@ -40018,7 +40018,7 @@
               <a:buNone/>
             </a:pPr>
             <a:r>
-              <a:rPr lang="en-US" sz="1150" dirty="0">
+              <a:rPr lang="en-US" sz="1150" b="1" dirty="0">
                 <a:solidFill>
                   <a:srgbClr val="2D2926"/>
                 </a:solidFill>
@@ -40146,7 +40146,7 @@
               <a:buNone/>
             </a:pPr>
             <a:r>
-              <a:rPr lang="en-US" sz="1150" dirty="0">
+              <a:rPr lang="en-US" sz="1150" b="1" dirty="0">
                 <a:solidFill>
                   <a:srgbClr val="2D2926"/>
                 </a:solidFill>
@@ -40274,7 +40274,7 @@
               <a:buNone/>
             </a:pPr>
             <a:r>
-              <a:rPr lang="en-US" sz="1150" dirty="0">
+              <a:rPr lang="en-US" sz="1150" b="1" dirty="0">
                 <a:solidFill>
                   <a:srgbClr val="2D2926"/>
                 </a:solidFill>
@@ -40402,7 +40402,7 @@
               <a:buNone/>
             </a:pPr>
             <a:r>
-              <a:rPr lang="en-US" sz="1150" dirty="0">
+              <a:rPr lang="en-US" sz="1150" b="1" dirty="0">
                 <a:solidFill>
                   <a:srgbClr val="2D2926"/>
                 </a:solidFill>
@@ -40530,7 +40530,7 @@
               <a:buNone/>
             </a:pPr>
             <a:r>
-              <a:rPr lang="en-US" sz="1150" dirty="0">
+              <a:rPr lang="en-US" sz="1150" b="1" dirty="0">
                 <a:solidFill>
                   <a:srgbClr val="2D2926"/>
                 </a:solidFill>
@@ -40569,7 +40569,7 @@
               <a:buNone/>
             </a:pPr>
             <a:r>
-              <a:rPr lang="en-US" sz="1050" dirty="0">
+              <a:rPr lang="en-US" sz="1050" b="1" dirty="0">
                 <a:solidFill>
                   <a:srgbClr val="8E6E47"/>
                 </a:solidFill>

--- a/assets/download/오가렌_세일즈가이드_세션2.pptx
+++ b/assets/download/오가렌_세일즈가이드_세션2.pptx
@@ -10802,7 +10802,7 @@
         <p:spPr>
           <a:xfrm>
             <a:off x="2468880" y="1490472"/>
-            <a:ext cx="5029200" cy="228600"/>
+            <a:ext cx="3200400" cy="228600"/>
           </a:xfrm>
           <a:prstGeom prst="rect">
             <a:avLst/>
@@ -10840,8 +10840,8 @@
         </p:nvSpPr>
         <p:spPr>
           <a:xfrm>
-            <a:off x="7315200" y="1490472"/>
-            <a:ext cx="1280160" cy="228600"/>
+            <a:off x="5760720" y="1490472"/>
+            <a:ext cx="2743200" cy="228600"/>
           </a:xfrm>
           <a:prstGeom prst="rect">
             <a:avLst/>
@@ -11008,7 +11008,7 @@
         <p:spPr>
           <a:xfrm>
             <a:off x="2468880" y="2542032"/>
-            <a:ext cx="5029200" cy="228600"/>
+            <a:ext cx="3200400" cy="228600"/>
           </a:xfrm>
           <a:prstGeom prst="rect">
             <a:avLst/>
@@ -11046,8 +11046,8 @@
         </p:nvSpPr>
         <p:spPr>
           <a:xfrm>
-            <a:off x="7315200" y="2542032"/>
-            <a:ext cx="1280160" cy="228600"/>
+            <a:off x="5760720" y="2542032"/>
+            <a:ext cx="2743200" cy="228600"/>
           </a:xfrm>
           <a:prstGeom prst="rect">
             <a:avLst/>
@@ -11214,7 +11214,7 @@
         <p:spPr>
           <a:xfrm>
             <a:off x="2468880" y="3593592"/>
-            <a:ext cx="5029200" cy="228600"/>
+            <a:ext cx="3200400" cy="228600"/>
           </a:xfrm>
           <a:prstGeom prst="rect">
             <a:avLst/>
@@ -11252,8 +11252,8 @@
         </p:nvSpPr>
         <p:spPr>
           <a:xfrm>
-            <a:off x="7315200" y="3593592"/>
-            <a:ext cx="1280160" cy="228600"/>
+            <a:off x="5760720" y="3593592"/>
+            <a:ext cx="2743200" cy="228600"/>
           </a:xfrm>
           <a:prstGeom prst="rect">
             <a:avLst/>
@@ -37977,23 +37977,23 @@
         <p:spPr>
           <a:xfrm>
             <a:off x="868680" y="1828800"/>
-            <a:ext cx="5394960" cy="365760"/>
-          </a:xfrm>
-          <a:prstGeom prst="rect">
-            <a:avLst/>
-          </a:prstGeom>
-          <a:noFill/>
-          <a:ln/>
-        </p:spPr>
-        <p:txBody>
-          <a:bodyPr wrap="square" lIns="0" tIns="0" rIns="0" bIns="0" rtlCol="0" anchor="ctr"/>
-          <a:lstStyle/>
-          <a:p>
-            <a:pPr indent="0" marL="0">
-              <a:buNone/>
-            </a:pPr>
-            <a:r>
-              <a:rPr lang="en-US" sz="1200" b="1" dirty="0">
+            <a:ext cx="5943600" cy="457200"/>
+          </a:xfrm>
+          <a:prstGeom prst="rect">
+            <a:avLst/>
+          </a:prstGeom>
+          <a:noFill/>
+          <a:ln/>
+        </p:spPr>
+        <p:txBody>
+          <a:bodyPr wrap="square" lIns="0" tIns="0" rIns="0" bIns="0" rtlCol="0" anchor="ctr"/>
+          <a:lstStyle/>
+          <a:p>
+            <a:pPr indent="0" marL="0">
+              <a:buNone/>
+            </a:pPr>
+            <a:r>
+              <a:rPr lang="en-US" sz="1150" b="1" dirty="0">
                 <a:solidFill>
                   <a:srgbClr val="2D2926"/>
                 </a:solidFill>
@@ -38003,7 +38003,7 @@
               </a:rPr>
               <a:t>"천천히 둘러보세요. 마음 가시는 제품 있으면 한 번 누워보셔도 됩니다."</a:t>
             </a:r>
-            <a:endParaRPr lang="en-US" sz="1200" dirty="0"/>
+            <a:endParaRPr lang="en-US" sz="1150" dirty="0"/>
           </a:p>
         </p:txBody>
       </p:sp>
@@ -38015,24 +38015,24 @@
         </p:nvSpPr>
         <p:spPr>
           <a:xfrm>
-            <a:off x="6355080" y="1828800"/>
-            <a:ext cx="2286000" cy="365760"/>
-          </a:xfrm>
-          <a:prstGeom prst="rect">
-            <a:avLst/>
-          </a:prstGeom>
-          <a:noFill/>
-          <a:ln/>
-        </p:spPr>
-        <p:txBody>
-          <a:bodyPr wrap="square" lIns="0" tIns="0" rIns="0" bIns="0" rtlCol="0" anchor="ctr"/>
-          <a:lstStyle/>
-          <a:p>
-            <a:pPr indent="0" marL="0">
-              <a:buNone/>
-            </a:pPr>
-            <a:r>
-              <a:rPr lang="en-US" sz="1000" dirty="0">
+            <a:off x="6903720" y="1828800"/>
+            <a:ext cx="1737360" cy="457200"/>
+          </a:xfrm>
+          <a:prstGeom prst="rect">
+            <a:avLst/>
+          </a:prstGeom>
+          <a:noFill/>
+          <a:ln/>
+        </p:spPr>
+        <p:txBody>
+          <a:bodyPr wrap="square" lIns="0" tIns="0" rIns="0" bIns="0" rtlCol="0" anchor="ctr"/>
+          <a:lstStyle/>
+          <a:p>
+            <a:pPr indent="0" marL="0">
+              <a:buNone/>
+            </a:pPr>
+            <a:r>
+              <a:rPr lang="en-US" sz="950" dirty="0">
                 <a:solidFill>
                   <a:srgbClr val="8E6E47"/>
                 </a:solidFill>
@@ -38042,7 +38042,7 @@
               </a:rPr>
               <a:t>체험 권유 + 압박 제로</a:t>
             </a:r>
-            <a:endParaRPr lang="en-US" sz="1000" dirty="0"/>
+            <a:endParaRPr lang="en-US" sz="950" dirty="0"/>
           </a:p>
         </p:txBody>
       </p:sp>
@@ -38094,23 +38094,23 @@
         <p:spPr>
           <a:xfrm>
             <a:off x="868680" y="2331720"/>
-            <a:ext cx="5394960" cy="365760"/>
-          </a:xfrm>
-          <a:prstGeom prst="rect">
-            <a:avLst/>
-          </a:prstGeom>
-          <a:noFill/>
-          <a:ln/>
-        </p:spPr>
-        <p:txBody>
-          <a:bodyPr wrap="square" lIns="0" tIns="0" rIns="0" bIns="0" rtlCol="0" anchor="ctr"/>
-          <a:lstStyle/>
-          <a:p>
-            <a:pPr indent="0" marL="0">
-              <a:buNone/>
-            </a:pPr>
-            <a:r>
-              <a:rPr lang="en-US" sz="1200" b="1" dirty="0">
+            <a:ext cx="5943600" cy="457200"/>
+          </a:xfrm>
+          <a:prstGeom prst="rect">
+            <a:avLst/>
+          </a:prstGeom>
+          <a:noFill/>
+          <a:ln/>
+        </p:spPr>
+        <p:txBody>
+          <a:bodyPr wrap="square" lIns="0" tIns="0" rIns="0" bIns="0" rtlCol="0" anchor="ctr"/>
+          <a:lstStyle/>
+          <a:p>
+            <a:pPr indent="0" marL="0">
+              <a:buNone/>
+            </a:pPr>
+            <a:r>
+              <a:rPr lang="en-US" sz="1150" b="1" dirty="0">
                 <a:solidFill>
                   <a:srgbClr val="2D2926"/>
                 </a:solidFill>
@@ -38120,7 +38120,7 @@
               </a:rPr>
               <a:t>"오늘 어떤 제품 보러 오셨어요? 신혼이세요, 이사세요?"</a:t>
             </a:r>
-            <a:endParaRPr lang="en-US" sz="1200" dirty="0"/>
+            <a:endParaRPr lang="en-US" sz="1150" dirty="0"/>
           </a:p>
         </p:txBody>
       </p:sp>
@@ -38132,24 +38132,24 @@
         </p:nvSpPr>
         <p:spPr>
           <a:xfrm>
-            <a:off x="6355080" y="2331720"/>
-            <a:ext cx="2286000" cy="365760"/>
-          </a:xfrm>
-          <a:prstGeom prst="rect">
-            <a:avLst/>
-          </a:prstGeom>
-          <a:noFill/>
-          <a:ln/>
-        </p:spPr>
-        <p:txBody>
-          <a:bodyPr wrap="square" lIns="0" tIns="0" rIns="0" bIns="0" rtlCol="0" anchor="ctr"/>
-          <a:lstStyle/>
-          <a:p>
-            <a:pPr indent="0" marL="0">
-              <a:buNone/>
-            </a:pPr>
-            <a:r>
-              <a:rPr lang="en-US" sz="1000" dirty="0">
+            <a:off x="6903720" y="2331720"/>
+            <a:ext cx="1737360" cy="457200"/>
+          </a:xfrm>
+          <a:prstGeom prst="rect">
+            <a:avLst/>
+          </a:prstGeom>
+          <a:noFill/>
+          <a:ln/>
+        </p:spPr>
+        <p:txBody>
+          <a:bodyPr wrap="square" lIns="0" tIns="0" rIns="0" bIns="0" rtlCol="0" anchor="ctr"/>
+          <a:lstStyle/>
+          <a:p>
+            <a:pPr indent="0" marL="0">
+              <a:buNone/>
+            </a:pPr>
+            <a:r>
+              <a:rPr lang="en-US" sz="950" dirty="0">
                 <a:solidFill>
                   <a:srgbClr val="8E6E47"/>
                 </a:solidFill>
@@ -38159,7 +38159,7 @@
               </a:rPr>
               <a:t>페르소나 1차 파악</a:t>
             </a:r>
-            <a:endParaRPr lang="en-US" sz="1000" dirty="0"/>
+            <a:endParaRPr lang="en-US" sz="950" dirty="0"/>
           </a:p>
         </p:txBody>
       </p:sp>
@@ -38211,23 +38211,23 @@
         <p:spPr>
           <a:xfrm>
             <a:off x="868680" y="2834640"/>
-            <a:ext cx="5394960" cy="365760"/>
-          </a:xfrm>
-          <a:prstGeom prst="rect">
-            <a:avLst/>
-          </a:prstGeom>
-          <a:noFill/>
-          <a:ln/>
-        </p:spPr>
-        <p:txBody>
-          <a:bodyPr wrap="square" lIns="0" tIns="0" rIns="0" bIns="0" rtlCol="0" anchor="ctr"/>
-          <a:lstStyle/>
-          <a:p>
-            <a:pPr indent="0" marL="0">
-              <a:buNone/>
-            </a:pPr>
-            <a:r>
-              <a:rPr lang="en-US" sz="1200" b="1" dirty="0">
+            <a:ext cx="5943600" cy="457200"/>
+          </a:xfrm>
+          <a:prstGeom prst="rect">
+            <a:avLst/>
+          </a:prstGeom>
+          <a:noFill/>
+          <a:ln/>
+        </p:spPr>
+        <p:txBody>
+          <a:bodyPr wrap="square" lIns="0" tIns="0" rIns="0" bIns="0" rtlCol="0" anchor="ctr"/>
+          <a:lstStyle/>
+          <a:p>
+            <a:pPr indent="0" marL="0">
+              <a:buNone/>
+            </a:pPr>
+            <a:r>
+              <a:rPr lang="en-US" sz="1150" b="1" dirty="0">
                 <a:solidFill>
                   <a:srgbClr val="2D2926"/>
                 </a:solidFill>
@@ -38237,7 +38237,7 @@
               </a:rPr>
               <a:t>"날씨가 더운데 들어오시느라 고생하셨어요. 차 한 잔 드릴까요?"</a:t>
             </a:r>
-            <a:endParaRPr lang="en-US" sz="1200" dirty="0"/>
+            <a:endParaRPr lang="en-US" sz="1150" dirty="0"/>
           </a:p>
         </p:txBody>
       </p:sp>
@@ -38249,24 +38249,24 @@
         </p:nvSpPr>
         <p:spPr>
           <a:xfrm>
-            <a:off x="6355080" y="2834640"/>
-            <a:ext cx="2286000" cy="365760"/>
-          </a:xfrm>
-          <a:prstGeom prst="rect">
-            <a:avLst/>
-          </a:prstGeom>
-          <a:noFill/>
-          <a:ln/>
-        </p:spPr>
-        <p:txBody>
-          <a:bodyPr wrap="square" lIns="0" tIns="0" rIns="0" bIns="0" rtlCol="0" anchor="ctr"/>
-          <a:lstStyle/>
-          <a:p>
-            <a:pPr indent="0" marL="0">
-              <a:buNone/>
-            </a:pPr>
-            <a:r>
-              <a:rPr lang="en-US" sz="1000" dirty="0">
+            <a:off x="6903720" y="2834640"/>
+            <a:ext cx="1737360" cy="457200"/>
+          </a:xfrm>
+          <a:prstGeom prst="rect">
+            <a:avLst/>
+          </a:prstGeom>
+          <a:noFill/>
+          <a:ln/>
+        </p:spPr>
+        <p:txBody>
+          <a:bodyPr wrap="square" lIns="0" tIns="0" rIns="0" bIns="0" rtlCol="0" anchor="ctr"/>
+          <a:lstStyle/>
+          <a:p>
+            <a:pPr indent="0" marL="0">
+              <a:buNone/>
+            </a:pPr>
+            <a:r>
+              <a:rPr lang="en-US" sz="950" dirty="0">
                 <a:solidFill>
                   <a:srgbClr val="8E6E47"/>
                 </a:solidFill>
@@ -38276,7 +38276,7 @@
               </a:rPr>
               <a:t>관계 형성 우선</a:t>
             </a:r>
-            <a:endParaRPr lang="en-US" sz="1000" dirty="0"/>
+            <a:endParaRPr lang="en-US" sz="950" dirty="0"/>
           </a:p>
         </p:txBody>
       </p:sp>
@@ -38328,23 +38328,23 @@
         <p:spPr>
           <a:xfrm>
             <a:off x="868680" y="3337560"/>
-            <a:ext cx="5394960" cy="365760"/>
-          </a:xfrm>
-          <a:prstGeom prst="rect">
-            <a:avLst/>
-          </a:prstGeom>
-          <a:noFill/>
-          <a:ln/>
-        </p:spPr>
-        <p:txBody>
-          <a:bodyPr wrap="square" lIns="0" tIns="0" rIns="0" bIns="0" rtlCol="0" anchor="ctr"/>
-          <a:lstStyle/>
-          <a:p>
-            <a:pPr indent="0" marL="0">
-              <a:buNone/>
-            </a:pPr>
-            <a:r>
-              <a:rPr lang="en-US" sz="1200" b="1" dirty="0">
+            <a:ext cx="5943600" cy="457200"/>
+          </a:xfrm>
+          <a:prstGeom prst="rect">
+            <a:avLst/>
+          </a:prstGeom>
+          <a:noFill/>
+          <a:ln/>
+        </p:spPr>
+        <p:txBody>
+          <a:bodyPr wrap="square" lIns="0" tIns="0" rIns="0" bIns="0" rtlCol="0" anchor="ctr"/>
+          <a:lstStyle/>
+          <a:p>
+            <a:pPr indent="0" marL="0">
+              <a:buNone/>
+            </a:pPr>
+            <a:r>
+              <a:rPr lang="en-US" sz="1150" b="1" dirty="0">
                 <a:solidFill>
                   <a:srgbClr val="2D2926"/>
                 </a:solidFill>
@@ -38354,7 +38354,7 @@
               </a:rPr>
               <a:t>"부부 함께 오셨으니까 두 분 같이 누워보실 수 있는 모델 위주로 안내드릴게요."</a:t>
             </a:r>
-            <a:endParaRPr lang="en-US" sz="1200" dirty="0"/>
+            <a:endParaRPr lang="en-US" sz="1150" dirty="0"/>
           </a:p>
         </p:txBody>
       </p:sp>
@@ -38366,24 +38366,24 @@
         </p:nvSpPr>
         <p:spPr>
           <a:xfrm>
-            <a:off x="6355080" y="3337560"/>
-            <a:ext cx="2286000" cy="365760"/>
-          </a:xfrm>
-          <a:prstGeom prst="rect">
-            <a:avLst/>
-          </a:prstGeom>
-          <a:noFill/>
-          <a:ln/>
-        </p:spPr>
-        <p:txBody>
-          <a:bodyPr wrap="square" lIns="0" tIns="0" rIns="0" bIns="0" rtlCol="0" anchor="ctr"/>
-          <a:lstStyle/>
-          <a:p>
-            <a:pPr indent="0" marL="0">
-              <a:buNone/>
-            </a:pPr>
-            <a:r>
-              <a:rPr lang="en-US" sz="1000" dirty="0">
+            <a:off x="6903720" y="3337560"/>
+            <a:ext cx="1737360" cy="457200"/>
+          </a:xfrm>
+          <a:prstGeom prst="rect">
+            <a:avLst/>
+          </a:prstGeom>
+          <a:noFill/>
+          <a:ln/>
+        </p:spPr>
+        <p:txBody>
+          <a:bodyPr wrap="square" lIns="0" tIns="0" rIns="0" bIns="0" rtlCol="0" anchor="ctr"/>
+          <a:lstStyle/>
+          <a:p>
+            <a:pPr indent="0" marL="0">
+              <a:buNone/>
+            </a:pPr>
+            <a:r>
+              <a:rPr lang="en-US" sz="950" dirty="0">
                 <a:solidFill>
                   <a:srgbClr val="8E6E47"/>
                 </a:solidFill>
@@ -38393,7 +38393,7 @@
               </a:rPr>
               <a:t>동반자 인지 시 효과적</a:t>
             </a:r>
-            <a:endParaRPr lang="en-US" sz="1000" dirty="0"/>
+            <a:endParaRPr lang="en-US" sz="950" dirty="0"/>
           </a:p>
         </p:txBody>
       </p:sp>
@@ -38445,23 +38445,23 @@
         <p:spPr>
           <a:xfrm>
             <a:off x="868680" y="3840480"/>
-            <a:ext cx="5394960" cy="365760"/>
-          </a:xfrm>
-          <a:prstGeom prst="rect">
-            <a:avLst/>
-          </a:prstGeom>
-          <a:noFill/>
-          <a:ln/>
-        </p:spPr>
-        <p:txBody>
-          <a:bodyPr wrap="square" lIns="0" tIns="0" rIns="0" bIns="0" rtlCol="0" anchor="ctr"/>
-          <a:lstStyle/>
-          <a:p>
-            <a:pPr indent="0" marL="0">
-              <a:buNone/>
-            </a:pPr>
-            <a:r>
-              <a:rPr lang="en-US" sz="1200" b="1" dirty="0">
+            <a:ext cx="5943600" cy="457200"/>
+          </a:xfrm>
+          <a:prstGeom prst="rect">
+            <a:avLst/>
+          </a:prstGeom>
+          <a:noFill/>
+          <a:ln/>
+        </p:spPr>
+        <p:txBody>
+          <a:bodyPr wrap="square" lIns="0" tIns="0" rIns="0" bIns="0" rtlCol="0" anchor="ctr"/>
+          <a:lstStyle/>
+          <a:p>
+            <a:pPr indent="0" marL="0">
+              <a:buNone/>
+            </a:pPr>
+            <a:r>
+              <a:rPr lang="en-US" sz="1150" b="1" dirty="0">
                 <a:solidFill>
                   <a:srgbClr val="2D2926"/>
                 </a:solidFill>
@@ -38471,7 +38471,7 @@
               </a:rPr>
               <a:t>"혹시 지금 쓰시는 침대에서 가장 불편하신 점 있으세요?"</a:t>
             </a:r>
-            <a:endParaRPr lang="en-US" sz="1200" dirty="0"/>
+            <a:endParaRPr lang="en-US" sz="1150" dirty="0"/>
           </a:p>
         </p:txBody>
       </p:sp>
@@ -38483,24 +38483,24 @@
         </p:nvSpPr>
         <p:spPr>
           <a:xfrm>
-            <a:off x="6355080" y="3840480"/>
-            <a:ext cx="2286000" cy="365760"/>
-          </a:xfrm>
-          <a:prstGeom prst="rect">
-            <a:avLst/>
-          </a:prstGeom>
-          <a:noFill/>
-          <a:ln/>
-        </p:spPr>
-        <p:txBody>
-          <a:bodyPr wrap="square" lIns="0" tIns="0" rIns="0" bIns="0" rtlCol="0" anchor="ctr"/>
-          <a:lstStyle/>
-          <a:p>
-            <a:pPr indent="0" marL="0">
-              <a:buNone/>
-            </a:pPr>
-            <a:r>
-              <a:rPr lang="en-US" sz="1000" dirty="0">
+            <a:off x="6903720" y="3840480"/>
+            <a:ext cx="1737360" cy="457200"/>
+          </a:xfrm>
+          <a:prstGeom prst="rect">
+            <a:avLst/>
+          </a:prstGeom>
+          <a:noFill/>
+          <a:ln/>
+        </p:spPr>
+        <p:txBody>
+          <a:bodyPr wrap="square" lIns="0" tIns="0" rIns="0" bIns="0" rtlCol="0" anchor="ctr"/>
+          <a:lstStyle/>
+          <a:p>
+            <a:pPr indent="0" marL="0">
+              <a:buNone/>
+            </a:pPr>
+            <a:r>
+              <a:rPr lang="en-US" sz="950" dirty="0">
                 <a:solidFill>
                   <a:srgbClr val="8E6E47"/>
                 </a:solidFill>
@@ -38510,7 +38510,7 @@
               </a:rPr>
               <a:t>니즈 파악 직진</a:t>
             </a:r>
-            <a:endParaRPr lang="en-US" sz="1000" dirty="0"/>
+            <a:endParaRPr lang="en-US" sz="950" dirty="0"/>
           </a:p>
         </p:txBody>
       </p:sp>
@@ -38957,24 +38957,24 @@
         </p:nvSpPr>
         <p:spPr>
           <a:xfrm>
-            <a:off x="640080" y="2286000"/>
-            <a:ext cx="3657600" cy="365760"/>
-          </a:xfrm>
-          <a:prstGeom prst="rect">
-            <a:avLst/>
-          </a:prstGeom>
-          <a:noFill/>
-          <a:ln/>
-        </p:spPr>
-        <p:txBody>
-          <a:bodyPr wrap="square" lIns="0" tIns="0" rIns="0" bIns="0" rtlCol="0" anchor="ctr"/>
-          <a:lstStyle/>
-          <a:p>
-            <a:pPr indent="0" marL="0">
-              <a:buNone/>
-            </a:pPr>
-            <a:r>
-              <a:rPr lang="en-US" sz="1150" b="1" dirty="0">
+            <a:off x="594360" y="2286000"/>
+            <a:ext cx="3703320" cy="365760"/>
+          </a:xfrm>
+          <a:prstGeom prst="rect">
+            <a:avLst/>
+          </a:prstGeom>
+          <a:noFill/>
+          <a:ln/>
+        </p:spPr>
+        <p:txBody>
+          <a:bodyPr wrap="square" lIns="0" tIns="0" rIns="0" bIns="0" rtlCol="0" anchor="ctr"/>
+          <a:lstStyle/>
+          <a:p>
+            <a:pPr indent="0" marL="0">
+              <a:buNone/>
+            </a:pPr>
+            <a:r>
+              <a:rPr lang="en-US" sz="1050" b="1" dirty="0">
                 <a:solidFill>
                   <a:srgbClr val="8E6E47"/>
                 </a:solidFill>
@@ -38984,7 +38984,7 @@
               </a:rPr>
               <a:t>"침실 방 크기는 어느 정도 되세요?"</a:t>
             </a:r>
-            <a:endParaRPr lang="en-US" sz="1150" dirty="0"/>
+            <a:endParaRPr lang="en-US" sz="1050" dirty="0"/>
           </a:p>
         </p:txBody>
       </p:sp>
@@ -39155,24 +39155,24 @@
         </p:nvSpPr>
         <p:spPr>
           <a:xfrm>
-            <a:off x="4800600" y="2286000"/>
-            <a:ext cx="3657600" cy="365760"/>
-          </a:xfrm>
-          <a:prstGeom prst="rect">
-            <a:avLst/>
-          </a:prstGeom>
-          <a:noFill/>
-          <a:ln/>
-        </p:spPr>
-        <p:txBody>
-          <a:bodyPr wrap="square" lIns="0" tIns="0" rIns="0" bIns="0" rtlCol="0" anchor="ctr"/>
-          <a:lstStyle/>
-          <a:p>
-            <a:pPr indent="0" marL="0">
-              <a:buNone/>
-            </a:pPr>
-            <a:r>
-              <a:rPr lang="en-US" sz="1150" b="1" dirty="0">
+            <a:off x="4754880" y="2286000"/>
+            <a:ext cx="3703320" cy="365760"/>
+          </a:xfrm>
+          <a:prstGeom prst="rect">
+            <a:avLst/>
+          </a:prstGeom>
+          <a:noFill/>
+          <a:ln/>
+        </p:spPr>
+        <p:txBody>
+          <a:bodyPr wrap="square" lIns="0" tIns="0" rIns="0" bIns="0" rtlCol="0" anchor="ctr"/>
+          <a:lstStyle/>
+          <a:p>
+            <a:pPr indent="0" marL="0">
+              <a:buNone/>
+            </a:pPr>
+            <a:r>
+              <a:rPr lang="en-US" sz="1050" b="1" dirty="0">
                 <a:solidFill>
                   <a:srgbClr val="8E6E47"/>
                 </a:solidFill>
@@ -39182,7 +39182,7 @@
               </a:rPr>
               <a:t>"혼자 쓰세요, 같이 쓰세요?"</a:t>
             </a:r>
-            <a:endParaRPr lang="en-US" sz="1150" dirty="0"/>
+            <a:endParaRPr lang="en-US" sz="1050" dirty="0"/>
           </a:p>
         </p:txBody>
       </p:sp>
@@ -39353,24 +39353,24 @@
         </p:nvSpPr>
         <p:spPr>
           <a:xfrm>
-            <a:off x="640080" y="3657600"/>
-            <a:ext cx="3657600" cy="365760"/>
-          </a:xfrm>
-          <a:prstGeom prst="rect">
-            <a:avLst/>
-          </a:prstGeom>
-          <a:noFill/>
-          <a:ln/>
-        </p:spPr>
-        <p:txBody>
-          <a:bodyPr wrap="square" lIns="0" tIns="0" rIns="0" bIns="0" rtlCol="0" anchor="ctr"/>
-          <a:lstStyle/>
-          <a:p>
-            <a:pPr indent="0" marL="0">
-              <a:buNone/>
-            </a:pPr>
-            <a:r>
-              <a:rPr lang="en-US" sz="1150" b="1" dirty="0">
+            <a:off x="594360" y="3657600"/>
+            <a:ext cx="3703320" cy="365760"/>
+          </a:xfrm>
+          <a:prstGeom prst="rect">
+            <a:avLst/>
+          </a:prstGeom>
+          <a:noFill/>
+          <a:ln/>
+        </p:spPr>
+        <p:txBody>
+          <a:bodyPr wrap="square" lIns="0" tIns="0" rIns="0" bIns="0" rtlCol="0" anchor="ctr"/>
+          <a:lstStyle/>
+          <a:p>
+            <a:pPr indent="0" marL="0">
+              <a:buNone/>
+            </a:pPr>
+            <a:r>
+              <a:rPr lang="en-US" sz="1050" b="1" dirty="0">
                 <a:solidFill>
                   <a:srgbClr val="8E6E47"/>
                 </a:solidFill>
@@ -39380,7 +39380,7 @@
               </a:rPr>
               <a:t>"보통 어떤 자세로 주무세요? 어디 불편한 곳 있으세요?"</a:t>
             </a:r>
-            <a:endParaRPr lang="en-US" sz="1150" dirty="0"/>
+            <a:endParaRPr lang="en-US" sz="1050" dirty="0"/>
           </a:p>
         </p:txBody>
       </p:sp>
@@ -39551,24 +39551,24 @@
         </p:nvSpPr>
         <p:spPr>
           <a:xfrm>
-            <a:off x="4800600" y="3657600"/>
-            <a:ext cx="3657600" cy="365760"/>
-          </a:xfrm>
-          <a:prstGeom prst="rect">
-            <a:avLst/>
-          </a:prstGeom>
-          <a:noFill/>
-          <a:ln/>
-        </p:spPr>
-        <p:txBody>
-          <a:bodyPr wrap="square" lIns="0" tIns="0" rIns="0" bIns="0" rtlCol="0" anchor="ctr"/>
-          <a:lstStyle/>
-          <a:p>
-            <a:pPr indent="0" marL="0">
-              <a:buNone/>
-            </a:pPr>
-            <a:r>
-              <a:rPr lang="en-US" sz="1150" b="1" dirty="0">
+            <a:off x="4754880" y="3657600"/>
+            <a:ext cx="3703320" cy="365760"/>
+          </a:xfrm>
+          <a:prstGeom prst="rect">
+            <a:avLst/>
+          </a:prstGeom>
+          <a:noFill/>
+          <a:ln/>
+        </p:spPr>
+        <p:txBody>
+          <a:bodyPr wrap="square" lIns="0" tIns="0" rIns="0" bIns="0" rtlCol="0" anchor="ctr"/>
+          <a:lstStyle/>
+          <a:p>
+            <a:pPr indent="0" marL="0">
+              <a:buNone/>
+            </a:pPr>
+            <a:r>
+              <a:rPr lang="en-US" sz="1050" b="1" dirty="0">
                 <a:solidFill>
                   <a:srgbClr val="8E6E47"/>
                 </a:solidFill>
@@ -39578,7 +39578,7 @@
               </a:rPr>
               <a:t>"지금 침대는 몇 년 정도 쓰셨어요?"</a:t>
             </a:r>
-            <a:endParaRPr lang="en-US" sz="1150" dirty="0"/>
+            <a:endParaRPr lang="en-US" sz="1050" dirty="0"/>
           </a:p>
         </p:txBody>
       </p:sp>

--- a/assets/download/오가렌_세일즈가이드_세션2.pptx
+++ b/assets/download/오가렌_세일즈가이드_세션2.pptx
@@ -6909,7 +6909,7 @@
                 <a:ea typeface="Malgun Gothic" pitchFamily="34" charset="-122"/>
                 <a:cs typeface="Malgun Gothic" pitchFamily="34" charset="-120"/>
               </a:rPr>
-              <a:t>가격을 깎지 마세요. 가치의 단위를 바꾸세요.</a:t>
+              <a:t>가격을 깎지 마세요. 시간 단위로 환산하세요.  ·  8시간 × 365일 × 8년 = 23,360시간</a:t>
             </a:r>
             <a:endParaRPr lang="en-US" sz="1300" dirty="0"/>
           </a:p>
@@ -7149,7 +7149,7 @@
                 <a:ea typeface="Malgun Gothic" pitchFamily="34" charset="-122"/>
                 <a:cs typeface="Malgun Gothic" pitchFamily="34" charset="-120"/>
               </a:rPr>
-              <a:t>"하루로 나누면 약 X백 원이세요. 8~10년 매일 8시간 쓰시니까요."</a:t>
+              <a:t>"8시간 × 365일 × 8년 = 23,360시간을 쓰시는 거예요. 시간당 100원이 안 돼요."</a:t>
             </a:r>
             <a:endParaRPr lang="en-US" sz="1100" dirty="0"/>
           </a:p>
@@ -7183,7 +7183,7 @@
                 <a:ea typeface="Malgun Gothic" pitchFamily="34" charset="-122"/>
                 <a:cs typeface="Malgun Gothic" pitchFamily="34" charset="-120"/>
               </a:rPr>
-              <a:t>"이 침대는 8년 보증입니다. 매일 밤 좋은 잠을 보장받는 비용이라고 생각하시면 어떠세요?"</a:t>
+              <a:t>"하루 약 X백 원이세요. 매일 밤 좋은 잠을 보장받는 8년치 비용이라고 보시면 됩니다."</a:t>
             </a:r>
             <a:endParaRPr lang="en-US" sz="1100" dirty="0"/>
           </a:p>
@@ -7286,7 +7286,7 @@
                 <a:ea typeface="Malgun Gothic" pitchFamily="34" charset="-122"/>
                 <a:cs typeface="Malgun Gothic" pitchFamily="34" charset="-120"/>
               </a:rPr>
-              <a:t>고가 제품은 "비교 단위"를 일 단위·시간 단위로 나누면 인식이 바뀝니다.</a:t>
+              <a:t>Tempur·Sleep Number·Saatva 등 글로벌 매장 표준 전법 — 매트리스만큼 자주·오래 쓰는 가구는 없습니다. "가격"을 "시간"으로 환산하면 "비싸다"가 "가성비 최강"으로 바뀝니다.</a:t>
             </a:r>
             <a:endParaRPr lang="en-US" sz="1100" dirty="0"/>
           </a:p>
@@ -7303,24 +7303,7 @@
                 <a:ea typeface="Malgun Gothic" pitchFamily="34" charset="-122"/>
                 <a:cs typeface="Malgun Gothic" pitchFamily="34" charset="-120"/>
               </a:rPr>
-              <a:t>또한 "수면 = 건강 = 일·관계의 질"로 가치의 차원을 옮기면, "가격"이 아니라 "투자"로 보입니다.</a:t>
-            </a:r>
-            <a:endParaRPr lang="en-US" sz="1100" dirty="0"/>
-          </a:p>
-          <a:p>
-            <a:pPr indent="0" marL="0">
-              <a:buNone/>
-            </a:pPr>
-            <a:r>
-              <a:rPr lang="en-US" sz="1100" dirty="0">
-                <a:solidFill>
-                  <a:srgbClr val="FFFFFF"/>
-                </a:solidFill>
-                <a:latin typeface="Malgun Gothic" pitchFamily="34" charset="0"/>
-                <a:ea typeface="Malgun Gothic" pitchFamily="34" charset="-122"/>
-                <a:cs typeface="Malgun Gothic" pitchFamily="34" charset="-120"/>
-              </a:rPr>
-              <a:t>절대 깎으려 하지 말고, 가치를 다시 설명하세요.</a:t>
+              <a:t>또한 "수면 = 건강 = 일·관계의 질". 가격이 아니라 투자로 보이게 만드세요. 절대 깎지 마세요.</a:t>
             </a:r>
             <a:endParaRPr lang="en-US" sz="1100" dirty="0"/>
           </a:p>
@@ -16961,7 +16944,7 @@
         </p:nvSpPr>
         <p:spPr>
           <a:xfrm>
-            <a:off x="457200" y="4800600"/>
+            <a:off x="457200" y="4572000"/>
             <a:ext cx="8229600" cy="228600"/>
           </a:xfrm>
           <a:prstGeom prst="rect">
@@ -19057,7 +19040,7 @@
         </p:nvSpPr>
         <p:spPr>
           <a:xfrm>
-            <a:off x="457200" y="4800600"/>
+            <a:off x="457200" y="4572000"/>
             <a:ext cx="8229600" cy="228600"/>
           </a:xfrm>
           <a:prstGeom prst="rect">
@@ -40546,46 +40529,110 @@
       </p:sp>
       <p:sp>
         <p:nvSpPr>
-          <p:cNvPr id="25" name="Text 23"/>
-          <p:cNvSpPr/>
-          <p:nvPr/>
-        </p:nvSpPr>
-        <p:spPr>
-          <a:xfrm>
-            <a:off x="457200" y="4434840"/>
-            <a:ext cx="8229600" cy="365760"/>
-          </a:xfrm>
-          <a:prstGeom prst="rect">
-            <a:avLst/>
-          </a:prstGeom>
-          <a:noFill/>
-          <a:ln/>
-        </p:spPr>
-        <p:txBody>
-          <a:bodyPr wrap="square" lIns="0" tIns="0" rIns="0" bIns="0" rtlCol="0" anchor="ctr"/>
-          <a:lstStyle/>
-          <a:p>
-            <a:pPr indent="0" marL="0">
-              <a:buNone/>
-            </a:pPr>
-            <a:r>
-              <a:rPr lang="en-US" sz="1050" b="1" dirty="0">
-                <a:solidFill>
-                  <a:srgbClr val="8E6E47"/>
-                </a:solidFill>
-                <a:latin typeface="Malgun Gothic" pitchFamily="34" charset="0"/>
-                <a:ea typeface="Malgun Gothic" pitchFamily="34" charset="-122"/>
-                <a:cs typeface="Malgun Gothic" pitchFamily="34" charset="-120"/>
-              </a:rPr>
-              <a:t>Tip — 체험 중에는 가급적 말을 줄이세요. 고객이 자기 몸의 신호를 듣는 시간입니다.</a:t>
-            </a:r>
-            <a:endParaRPr lang="en-US" sz="1050" dirty="0"/>
-          </a:p>
-        </p:txBody>
+          <p:cNvPr id="25" name="Shape 23"/>
+          <p:cNvSpPr/>
+          <p:nvPr/>
+        </p:nvSpPr>
+        <p:spPr>
+          <a:xfrm>
+            <a:off x="457200" y="4297680"/>
+            <a:ext cx="8229600" cy="594360"/>
+          </a:xfrm>
+          <a:prstGeom prst="rect">
+            <a:avLst/>
+          </a:prstGeom>
+          <a:solidFill>
+            <a:srgbClr val="2D2926"/>
+          </a:solidFill>
+          <a:ln w="12700">
+            <a:solidFill>
+              <a:srgbClr val="2D2926"/>
+            </a:solidFill>
+            <a:prstDash val="solid"/>
+          </a:ln>
+        </p:spPr>
       </p:sp>
       <p:sp>
         <p:nvSpPr>
           <p:cNvPr id="26" name="Text 24"/>
+          <p:cNvSpPr/>
+          <p:nvPr/>
+        </p:nvSpPr>
+        <p:spPr>
+          <a:xfrm>
+            <a:off x="640080" y="4343400"/>
+            <a:ext cx="5029200" cy="256032"/>
+          </a:xfrm>
+          <a:prstGeom prst="rect">
+            <a:avLst/>
+          </a:prstGeom>
+          <a:noFill/>
+          <a:ln/>
+        </p:spPr>
+        <p:txBody>
+          <a:bodyPr wrap="square" lIns="0" tIns="0" rIns="0" bIns="0" rtlCol="0" anchor="ctr"/>
+          <a:lstStyle/>
+          <a:p>
+            <a:pPr indent="0" marL="0">
+              <a:buNone/>
+            </a:pPr>
+            <a:r>
+              <a:rPr lang="en-US" sz="1100" b="1" spc="150" kern="0" dirty="0">
+                <a:solidFill>
+                  <a:srgbClr val="B8956A"/>
+                </a:solidFill>
+                <a:latin typeface="Malgun Gothic" pitchFamily="34" charset="0"/>
+                <a:ea typeface="Malgun Gothic" pitchFamily="34" charset="-122"/>
+                <a:cs typeface="Malgun Gothic" pitchFamily="34" charset="-120"/>
+              </a:rPr>
+              <a:t>글로벌 표준  ·  12분 룰 + 두 번 누워보기</a:t>
+            </a:r>
+            <a:endParaRPr lang="en-US" sz="1100" dirty="0"/>
+          </a:p>
+        </p:txBody>
+      </p:sp>
+      <p:sp>
+        <p:nvSpPr>
+          <p:cNvPr id="27" name="Text 25"/>
+          <p:cNvSpPr/>
+          <p:nvPr/>
+        </p:nvSpPr>
+        <p:spPr>
+          <a:xfrm>
+            <a:off x="640080" y="4590288"/>
+            <a:ext cx="7863840" cy="274320"/>
+          </a:xfrm>
+          <a:prstGeom prst="rect">
+            <a:avLst/>
+          </a:prstGeom>
+          <a:noFill/>
+          <a:ln/>
+        </p:spPr>
+        <p:txBody>
+          <a:bodyPr wrap="square" lIns="0" tIns="0" rIns="0" bIns="0" rtlCol="0" anchor="ctr"/>
+          <a:lstStyle/>
+          <a:p>
+            <a:pPr indent="0" marL="0">
+              <a:buNone/>
+            </a:pPr>
+            <a:r>
+              <a:rPr lang="en-US" sz="950" dirty="0">
+                <a:solidFill>
+                  <a:srgbClr val="FFFFFF"/>
+                </a:solidFill>
+                <a:latin typeface="Malgun Gothic" pitchFamily="34" charset="0"/>
+                <a:ea typeface="Malgun Gothic" pitchFamily="34" charset="-122"/>
+                <a:cs typeface="Malgun Gothic" pitchFamily="34" charset="-120"/>
+              </a:rPr>
+              <a:t>매트리스는 최소 12분은 누워봐야 진짜 느낌이 옵니다. 처음에는 "편하다", 다음에는 "어디가 어떻게 편하다"가 보여요. 후보 2개는 반드시 두 번씩 누워보게 — 첫 체험은 인상, 두 번째 체험이 결정.</a:t>
+            </a:r>
+            <a:endParaRPr lang="en-US" sz="950" dirty="0"/>
+          </a:p>
+        </p:txBody>
+      </p:sp>
+      <p:sp>
+        <p:nvSpPr>
+          <p:cNvPr id="28" name="Text 26"/>
           <p:cNvSpPr/>
           <p:nvPr/>
         </p:nvSpPr>
@@ -40624,7 +40671,7 @@
       </p:sp>
       <p:sp>
         <p:nvSpPr>
-          <p:cNvPr id="27" name="Text 25"/>
+          <p:cNvPr id="29" name="Text 27"/>
           <p:cNvSpPr/>
           <p:nvPr/>
         </p:nvSpPr>
@@ -40663,7 +40710,7 @@
       </p:sp>
       <p:sp>
         <p:nvSpPr>
-          <p:cNvPr id="28" name="Text 26"/>
+          <p:cNvPr id="30" name="Text 28"/>
           <p:cNvSpPr/>
           <p:nvPr/>
         </p:nvSpPr>
